--- a/day2-deck/decks/Fixed Ops Productivity - House Style.pptx
+++ b/day2-deck/decks/Fixed Ops Productivity - House Style.pptx
@@ -202,9 +202,9 @@
           </c:marker>
           <c:cat>
             <c:multiLvlStrRef>
-              <c:f>Sheet1!$A$2:$A$10</c:f>
+              <c:f>Sheet1!$A$2:$A$13</c:f>
               <c:multiLvlStrCache>
-                <c:ptCount val="9"/>
+                <c:ptCount val="12"/>
                 <c:lvl>
                   <c:pt idx="0">
                     <c:v>Jan</c:v>
@@ -233,16 +233,25 @@
                   <c:pt idx="8">
                     <c:v>Sep</c:v>
                   </c:pt>
+                  <c:pt idx="9">
+                    <c:v>Oct</c:v>
+                  </c:pt>
+                  <c:pt idx="10">
+                    <c:v>Nov</c:v>
+                  </c:pt>
+                  <c:pt idx="11">
+                    <c:v>Dec</c:v>
+                  </c:pt>
                 </c:lvl>
               </c:multiLvlStrCache>
             </c:multiLvlStrRef>
           </c:cat>
           <c:val>
             <c:numRef>
-              <c:f>Sheet1!$B$2:$B$10</c:f>
+              <c:f>Sheet1!$B$2:$B$13</c:f>
               <c:numCache>
                 <c:formatCode>General</c:formatCode>
-                <c:ptCount val="9"/>
+                <c:ptCount val="12"/>
                 <c:pt idx="0">
                   <c:v>12996</c:v>
                 </c:pt>
@@ -269,6 +278,15 @@
                 </c:pt>
                 <c:pt idx="8">
                   <c:v>13721</c:v>
+                </c:pt>
+                <c:pt idx="9">
+                  <c:v/>
+                </c:pt>
+                <c:pt idx="10">
+                  <c:v/>
+                </c:pt>
+                <c:pt idx="11">
+                  <c:v/>
                 </c:pt>
               </c:numCache>
             </c:numRef>
@@ -488,9 +506,9 @@
           </c:marker>
           <c:cat>
             <c:multiLvlStrRef>
-              <c:f>Sheet1!$A$2:$A$10</c:f>
+              <c:f>Sheet1!$A$2:$A$13</c:f>
               <c:multiLvlStrCache>
-                <c:ptCount val="9"/>
+                <c:ptCount val="12"/>
                 <c:lvl>
                   <c:pt idx="0">
                     <c:v>Jan</c:v>
@@ -519,16 +537,25 @@
                   <c:pt idx="8">
                     <c:v>Sep</c:v>
                   </c:pt>
+                  <c:pt idx="9">
+                    <c:v>Oct</c:v>
+                  </c:pt>
+                  <c:pt idx="10">
+                    <c:v>Nov</c:v>
+                  </c:pt>
+                  <c:pt idx="11">
+                    <c:v>Dec</c:v>
+                  </c:pt>
                 </c:lvl>
               </c:multiLvlStrCache>
             </c:multiLvlStrRef>
           </c:cat>
           <c:val>
             <c:numRef>
-              <c:f>Sheet1!$B$2:$B$10</c:f>
+              <c:f>Sheet1!$B$2:$B$13</c:f>
               <c:numCache>
                 <c:formatCode>General</c:formatCode>
-                <c:ptCount val="9"/>
+                <c:ptCount val="12"/>
                 <c:pt idx="0">
                   <c:v>181.76470588235293</c:v>
                 </c:pt>
@@ -555,6 +582,15 @@
                 </c:pt>
                 <c:pt idx="8">
                   <c:v>160.78225806451613</c:v>
+                </c:pt>
+                <c:pt idx="9">
+                  <c:v>173.3413654618474</c:v>
+                </c:pt>
+                <c:pt idx="10">
+                  <c:v>152.834008097166</c:v>
+                </c:pt>
+                <c:pt idx="11">
+                  <c:v>159.43373493975903</c:v>
                 </c:pt>
               </c:numCache>
             </c:numRef>
@@ -795,9 +831,9 @@
           </c:marker>
           <c:cat>
             <c:multiLvlStrRef>
-              <c:f>Sheet1!$A$2:$A$10</c:f>
+              <c:f>Sheet1!$A$2:$A$13</c:f>
               <c:multiLvlStrCache>
-                <c:ptCount val="9"/>
+                <c:ptCount val="12"/>
                 <c:lvl>
                   <c:pt idx="0">
                     <c:v>Jan</c:v>
@@ -826,16 +862,25 @@
                   <c:pt idx="8">
                     <c:v>Sep</c:v>
                   </c:pt>
+                  <c:pt idx="9">
+                    <c:v>Oct</c:v>
+                  </c:pt>
+                  <c:pt idx="10">
+                    <c:v>Nov</c:v>
+                  </c:pt>
+                  <c:pt idx="11">
+                    <c:v>Dec</c:v>
+                  </c:pt>
                 </c:lvl>
               </c:multiLvlStrCache>
             </c:multiLvlStrRef>
           </c:cat>
           <c:val>
             <c:numRef>
-              <c:f>Sheet1!$B$2:$B$10</c:f>
+              <c:f>Sheet1!$B$2:$B$13</c:f>
               <c:numCache>
                 <c:formatCode>General</c:formatCode>
-                <c:ptCount val="9"/>
+                <c:ptCount val="12"/>
                 <c:pt idx="0">
                   <c:v>26.75294117647059</c:v>
                 </c:pt>
@@ -862,6 +907,15 @@
                 </c:pt>
                 <c:pt idx="8">
                   <c:v>26.98896103896104</c:v>
+                </c:pt>
+                <c:pt idx="9">
+                  <c:v/>
+                </c:pt>
+                <c:pt idx="10">
+                  <c:v/>
+                </c:pt>
+                <c:pt idx="11">
+                  <c:v/>
                 </c:pt>
               </c:numCache>
             </c:numRef>
@@ -1078,9 +1132,9 @@
           </c:marker>
           <c:cat>
             <c:multiLvlStrRef>
-              <c:f>Sheet1!$A$2:$A$10</c:f>
+              <c:f>Sheet1!$A$2:$A$13</c:f>
               <c:multiLvlStrCache>
-                <c:ptCount val="9"/>
+                <c:ptCount val="12"/>
                 <c:lvl>
                   <c:pt idx="0">
                     <c:v>Jan</c:v>
@@ -1109,16 +1163,25 @@
                   <c:pt idx="8">
                     <c:v>Sep</c:v>
                   </c:pt>
+                  <c:pt idx="9">
+                    <c:v>Oct</c:v>
+                  </c:pt>
+                  <c:pt idx="10">
+                    <c:v>Nov</c:v>
+                  </c:pt>
+                  <c:pt idx="11">
+                    <c:v>Dec</c:v>
+                  </c:pt>
                 </c:lvl>
               </c:multiLvlStrCache>
             </c:multiLvlStrRef>
           </c:cat>
           <c:val>
             <c:numRef>
-              <c:f>Sheet1!$B$2:$B$10</c:f>
+              <c:f>Sheet1!$B$2:$B$13</c:f>
               <c:numCache>
                 <c:formatCode>General</c:formatCode>
-                <c:ptCount val="9"/>
+                <c:ptCount val="12"/>
                 <c:pt idx="0">
                   <c:v>26.75294117647059</c:v>
                 </c:pt>
@@ -1145,6 +1208,15 @@
                 </c:pt>
                 <c:pt idx="8">
                   <c:v>26.98896103896104</c:v>
+                </c:pt>
+                <c:pt idx="9">
+                  <c:v/>
+                </c:pt>
+                <c:pt idx="10">
+                  <c:v/>
+                </c:pt>
+                <c:pt idx="11">
+                  <c:v/>
                 </c:pt>
               </c:numCache>
             </c:numRef>
@@ -1370,9 +1442,9 @@
           </c:marker>
           <c:cat>
             <c:multiLvlStrRef>
-              <c:f>Sheet1!$A$2:$A$10</c:f>
+              <c:f>Sheet1!$A$2:$A$13</c:f>
               <c:multiLvlStrCache>
-                <c:ptCount val="9"/>
+                <c:ptCount val="12"/>
                 <c:lvl>
                   <c:pt idx="0">
                     <c:v>Jan</c:v>
@@ -1401,16 +1473,25 @@
                   <c:pt idx="8">
                     <c:v>Sep</c:v>
                   </c:pt>
+                  <c:pt idx="9">
+                    <c:v>Oct</c:v>
+                  </c:pt>
+                  <c:pt idx="10">
+                    <c:v>Nov</c:v>
+                  </c:pt>
+                  <c:pt idx="11">
+                    <c:v>Dec</c:v>
+                  </c:pt>
                 </c:lvl>
               </c:multiLvlStrCache>
             </c:multiLvlStrRef>
           </c:cat>
           <c:val>
             <c:numRef>
-              <c:f>Sheet1!$B$2:$B$10</c:f>
+              <c:f>Sheet1!$B$2:$B$13</c:f>
               <c:numCache>
                 <c:formatCode>General</c:formatCode>
-                <c:ptCount val="9"/>
+                <c:ptCount val="12"/>
                 <c:pt idx="0">
                   <c:v/>
                 </c:pt>
@@ -1436,6 +1517,15 @@
                   <c:v/>
                 </c:pt>
                 <c:pt idx="8">
+                  <c:v/>
+                </c:pt>
+                <c:pt idx="9">
+                  <c:v/>
+                </c:pt>
+                <c:pt idx="10">
+                  <c:v/>
+                </c:pt>
+                <c:pt idx="11">
                   <c:v/>
                 </c:pt>
               </c:numCache>
@@ -1662,9 +1752,9 @@
           </c:marker>
           <c:cat>
             <c:multiLvlStrRef>
-              <c:f>Sheet1!$A$2:$A$10</c:f>
+              <c:f>Sheet1!$A$2:$A$13</c:f>
               <c:multiLvlStrCache>
-                <c:ptCount val="9"/>
+                <c:ptCount val="12"/>
                 <c:lvl>
                   <c:pt idx="0">
                     <c:v>Jan</c:v>
@@ -1693,16 +1783,25 @@
                   <c:pt idx="8">
                     <c:v>Sep</c:v>
                   </c:pt>
+                  <c:pt idx="9">
+                    <c:v>Oct</c:v>
+                  </c:pt>
+                  <c:pt idx="10">
+                    <c:v>Nov</c:v>
+                  </c:pt>
+                  <c:pt idx="11">
+                    <c:v>Dec</c:v>
+                  </c:pt>
                 </c:lvl>
               </c:multiLvlStrCache>
             </c:multiLvlStrRef>
           </c:cat>
           <c:val>
             <c:numRef>
-              <c:f>Sheet1!$B$2:$B$10</c:f>
+              <c:f>Sheet1!$B$2:$B$13</c:f>
               <c:numCache>
                 <c:formatCode>General</c:formatCode>
-                <c:ptCount val="9"/>
+                <c:ptCount val="12"/>
                 <c:pt idx="0">
                   <c:v/>
                 </c:pt>
@@ -1728,6 +1827,15 @@
                   <c:v/>
                 </c:pt>
                 <c:pt idx="8">
+                  <c:v/>
+                </c:pt>
+                <c:pt idx="9">
+                  <c:v/>
+                </c:pt>
+                <c:pt idx="10">
+                  <c:v/>
+                </c:pt>
+                <c:pt idx="11">
                   <c:v/>
                 </c:pt>
               </c:numCache>
@@ -1954,9 +2062,9 @@
           </c:marker>
           <c:cat>
             <c:multiLvlStrRef>
-              <c:f>Sheet1!$A$2:$A$10</c:f>
+              <c:f>Sheet1!$A$2:$A$13</c:f>
               <c:multiLvlStrCache>
-                <c:ptCount val="9"/>
+                <c:ptCount val="12"/>
                 <c:lvl>
                   <c:pt idx="0">
                     <c:v>Jan</c:v>
@@ -1985,16 +2093,25 @@
                   <c:pt idx="8">
                     <c:v>Sep</c:v>
                   </c:pt>
+                  <c:pt idx="9">
+                    <c:v>Oct</c:v>
+                  </c:pt>
+                  <c:pt idx="10">
+                    <c:v>Nov</c:v>
+                  </c:pt>
+                  <c:pt idx="11">
+                    <c:v>Dec</c:v>
+                  </c:pt>
                 </c:lvl>
               </c:multiLvlStrCache>
             </c:multiLvlStrRef>
           </c:cat>
           <c:val>
             <c:numRef>
-              <c:f>Sheet1!$B$2:$B$10</c:f>
+              <c:f>Sheet1!$B$2:$B$13</c:f>
               <c:numCache>
                 <c:formatCode>General</c:formatCode>
-                <c:ptCount val="9"/>
+                <c:ptCount val="12"/>
                 <c:pt idx="0">
                   <c:v>26.62153846153846</c:v>
                 </c:pt>
@@ -2021,6 +2138,15 @@
                 </c:pt>
                 <c:pt idx="8">
                   <c:v>24.67450495049505</c:v>
+                </c:pt>
+                <c:pt idx="9">
+                  <c:v>26.908977556109726</c:v>
+                </c:pt>
+                <c:pt idx="10">
+                  <c:v>23.8621997471555</c:v>
+                </c:pt>
+                <c:pt idx="11">
+                  <c:v>25.399232245681382</c:v>
                 </c:pt>
               </c:numCache>
             </c:numRef>
@@ -2249,9 +2375,9 @@
           </c:marker>
           <c:cat>
             <c:multiLvlStrRef>
-              <c:f>Sheet1!$A$2:$A$10</c:f>
+              <c:f>Sheet1!$A$2:$A$13</c:f>
               <c:multiLvlStrCache>
-                <c:ptCount val="9"/>
+                <c:ptCount val="12"/>
                 <c:lvl>
                   <c:pt idx="0">
                     <c:v>Jan</c:v>
@@ -2280,16 +2406,25 @@
                   <c:pt idx="8">
                     <c:v>Sep</c:v>
                   </c:pt>
+                  <c:pt idx="9">
+                    <c:v>Oct</c:v>
+                  </c:pt>
+                  <c:pt idx="10">
+                    <c:v>Nov</c:v>
+                  </c:pt>
+                  <c:pt idx="11">
+                    <c:v>Dec</c:v>
+                  </c:pt>
                 </c:lvl>
               </c:multiLvlStrCache>
             </c:multiLvlStrRef>
           </c:cat>
           <c:val>
             <c:numRef>
-              <c:f>Sheet1!$B$2:$B$10</c:f>
+              <c:f>Sheet1!$B$2:$B$13</c:f>
               <c:numCache>
                 <c:formatCode>General</c:formatCode>
-                <c:ptCount val="9"/>
+                <c:ptCount val="12"/>
                 <c:pt idx="0">
                   <c:v>26.62153846153846</c:v>
                 </c:pt>
@@ -2316,6 +2451,15 @@
                 </c:pt>
                 <c:pt idx="8">
                   <c:v>24.67450495049505</c:v>
+                </c:pt>
+                <c:pt idx="9">
+                  <c:v>26.908977556109726</c:v>
+                </c:pt>
+                <c:pt idx="10">
+                  <c:v>23.8621997471555</c:v>
+                </c:pt>
+                <c:pt idx="11">
+                  <c:v>25.399232245681382</c:v>
                 </c:pt>
               </c:numCache>
             </c:numRef>
@@ -2556,9 +2700,9 @@
           </c:marker>
           <c:cat>
             <c:multiLvlStrRef>
-              <c:f>Sheet1!$A$2:$A$10</c:f>
+              <c:f>Sheet1!$A$2:$A$13</c:f>
               <c:multiLvlStrCache>
-                <c:ptCount val="9"/>
+                <c:ptCount val="12"/>
                 <c:lvl>
                   <c:pt idx="0">
                     <c:v>Jan</c:v>
@@ -2587,16 +2731,25 @@
                   <c:pt idx="8">
                     <c:v>Sep</c:v>
                   </c:pt>
+                  <c:pt idx="9">
+                    <c:v>Oct</c:v>
+                  </c:pt>
+                  <c:pt idx="10">
+                    <c:v>Nov</c:v>
+                  </c:pt>
+                  <c:pt idx="11">
+                    <c:v>Dec</c:v>
+                  </c:pt>
                 </c:lvl>
               </c:multiLvlStrCache>
             </c:multiLvlStrRef>
           </c:cat>
           <c:val>
             <c:numRef>
-              <c:f>Sheet1!$B$2:$B$10</c:f>
+              <c:f>Sheet1!$B$2:$B$13</c:f>
               <c:numCache>
                 <c:formatCode>General</c:formatCode>
-                <c:ptCount val="9"/>
+                <c:ptCount val="12"/>
                 <c:pt idx="0">
                   <c:v>386.1509433962264</c:v>
                 </c:pt>
@@ -2623,6 +2776,15 @@
                 </c:pt>
                 <c:pt idx="8">
                   <c:v>399.6442307692308</c:v>
+                </c:pt>
+                <c:pt idx="9">
+                  <c:v/>
+                </c:pt>
+                <c:pt idx="10">
+                  <c:v/>
+                </c:pt>
+                <c:pt idx="11">
+                  <c:v/>
                 </c:pt>
               </c:numCache>
             </c:numRef>
@@ -2839,9 +3001,9 @@
           </c:marker>
           <c:cat>
             <c:multiLvlStrRef>
-              <c:f>Sheet1!$A$2:$A$10</c:f>
+              <c:f>Sheet1!$A$2:$A$13</c:f>
               <c:multiLvlStrCache>
-                <c:ptCount val="9"/>
+                <c:ptCount val="12"/>
                 <c:lvl>
                   <c:pt idx="0">
                     <c:v>Jan</c:v>
@@ -2870,16 +3032,25 @@
                   <c:pt idx="8">
                     <c:v>Sep</c:v>
                   </c:pt>
+                  <c:pt idx="9">
+                    <c:v>Oct</c:v>
+                  </c:pt>
+                  <c:pt idx="10">
+                    <c:v>Nov</c:v>
+                  </c:pt>
+                  <c:pt idx="11">
+                    <c:v>Dec</c:v>
+                  </c:pt>
                 </c:lvl>
               </c:multiLvlStrCache>
             </c:multiLvlStrRef>
           </c:cat>
           <c:val>
             <c:numRef>
-              <c:f>Sheet1!$B$2:$B$10</c:f>
+              <c:f>Sheet1!$B$2:$B$13</c:f>
               <c:numCache>
                 <c:formatCode>General</c:formatCode>
-                <c:ptCount val="9"/>
+                <c:ptCount val="12"/>
                 <c:pt idx="0">
                   <c:v>386.1509433962264</c:v>
                 </c:pt>
@@ -2906,6 +3077,15 @@
                 </c:pt>
                 <c:pt idx="8">
                   <c:v>399.6442307692308</c:v>
+                </c:pt>
+                <c:pt idx="9">
+                  <c:v/>
+                </c:pt>
+                <c:pt idx="10">
+                  <c:v/>
+                </c:pt>
+                <c:pt idx="11">
+                  <c:v/>
                 </c:pt>
               </c:numCache>
             </c:numRef>
@@ -3131,9 +3311,9 @@
           </c:marker>
           <c:cat>
             <c:multiLvlStrRef>
-              <c:f>Sheet1!$A$2:$A$10</c:f>
+              <c:f>Sheet1!$A$2:$A$13</c:f>
               <c:multiLvlStrCache>
-                <c:ptCount val="9"/>
+                <c:ptCount val="12"/>
                 <c:lvl>
                   <c:pt idx="0">
                     <c:v>Jan</c:v>
@@ -3162,16 +3342,25 @@
                   <c:pt idx="8">
                     <c:v>Sep</c:v>
                   </c:pt>
+                  <c:pt idx="9">
+                    <c:v>Oct</c:v>
+                  </c:pt>
+                  <c:pt idx="10">
+                    <c:v>Nov</c:v>
+                  </c:pt>
+                  <c:pt idx="11">
+                    <c:v>Dec</c:v>
+                  </c:pt>
                 </c:lvl>
               </c:multiLvlStrCache>
             </c:multiLvlStrRef>
           </c:cat>
           <c:val>
             <c:numRef>
-              <c:f>Sheet1!$B$2:$B$10</c:f>
+              <c:f>Sheet1!$B$2:$B$13</c:f>
               <c:numCache>
                 <c:formatCode>General</c:formatCode>
-                <c:ptCount val="9"/>
+                <c:ptCount val="12"/>
                 <c:pt idx="0">
                   <c:v/>
                 </c:pt>
@@ -3197,6 +3386,15 @@
                   <c:v/>
                 </c:pt>
                 <c:pt idx="8">
+                  <c:v/>
+                </c:pt>
+                <c:pt idx="9">
+                  <c:v/>
+                </c:pt>
+                <c:pt idx="10">
+                  <c:v/>
+                </c:pt>
+                <c:pt idx="11">
                   <c:v/>
                 </c:pt>
               </c:numCache>
@@ -3423,9 +3621,9 @@
           </c:marker>
           <c:cat>
             <c:multiLvlStrRef>
-              <c:f>Sheet1!$A$2:$A$10</c:f>
+              <c:f>Sheet1!$A$2:$A$13</c:f>
               <c:multiLvlStrCache>
-                <c:ptCount val="9"/>
+                <c:ptCount val="12"/>
                 <c:lvl>
                   <c:pt idx="0">
                     <c:v>Jan</c:v>
@@ -3454,16 +3652,25 @@
                   <c:pt idx="8">
                     <c:v>Sep</c:v>
                   </c:pt>
+                  <c:pt idx="9">
+                    <c:v>Oct</c:v>
+                  </c:pt>
+                  <c:pt idx="10">
+                    <c:v>Nov</c:v>
+                  </c:pt>
+                  <c:pt idx="11">
+                    <c:v>Dec</c:v>
+                  </c:pt>
                 </c:lvl>
               </c:multiLvlStrCache>
             </c:multiLvlStrRef>
           </c:cat>
           <c:val>
             <c:numRef>
-              <c:f>Sheet1!$B$2:$B$10</c:f>
+              <c:f>Sheet1!$B$2:$B$13</c:f>
               <c:numCache>
                 <c:formatCode>General</c:formatCode>
-                <c:ptCount val="9"/>
+                <c:ptCount val="12"/>
                 <c:pt idx="0">
                   <c:v>12996</c:v>
                 </c:pt>
@@ -3490,6 +3697,15 @@
                 </c:pt>
                 <c:pt idx="8">
                   <c:v>13721</c:v>
+                </c:pt>
+                <c:pt idx="9">
+                  <c:v/>
+                </c:pt>
+                <c:pt idx="10">
+                  <c:v/>
+                </c:pt>
+                <c:pt idx="11">
+                  <c:v/>
                 </c:pt>
               </c:numCache>
             </c:numRef>
@@ -3715,9 +3931,9 @@
           </c:marker>
           <c:cat>
             <c:multiLvlStrRef>
-              <c:f>Sheet1!$A$2:$A$10</c:f>
+              <c:f>Sheet1!$A$2:$A$13</c:f>
               <c:multiLvlStrCache>
-                <c:ptCount val="9"/>
+                <c:ptCount val="12"/>
                 <c:lvl>
                   <c:pt idx="0">
                     <c:v>Jan</c:v>
@@ -3746,16 +3962,25 @@
                   <c:pt idx="8">
                     <c:v>Sep</c:v>
                   </c:pt>
+                  <c:pt idx="9">
+                    <c:v>Oct</c:v>
+                  </c:pt>
+                  <c:pt idx="10">
+                    <c:v>Nov</c:v>
+                  </c:pt>
+                  <c:pt idx="11">
+                    <c:v>Dec</c:v>
+                  </c:pt>
                 </c:lvl>
               </c:multiLvlStrCache>
             </c:multiLvlStrRef>
           </c:cat>
           <c:val>
             <c:numRef>
-              <c:f>Sheet1!$B$2:$B$10</c:f>
+              <c:f>Sheet1!$B$2:$B$13</c:f>
               <c:numCache>
                 <c:formatCode>General</c:formatCode>
-                <c:ptCount val="9"/>
+                <c:ptCount val="12"/>
                 <c:pt idx="0">
                   <c:v/>
                 </c:pt>
@@ -3781,6 +4006,15 @@
                   <c:v/>
                 </c:pt>
                 <c:pt idx="8">
+                  <c:v/>
+                </c:pt>
+                <c:pt idx="9">
+                  <c:v/>
+                </c:pt>
+                <c:pt idx="10">
+                  <c:v/>
+                </c:pt>
+                <c:pt idx="11">
                   <c:v/>
                 </c:pt>
               </c:numCache>
@@ -4007,9 +4241,9 @@
           </c:marker>
           <c:cat>
             <c:multiLvlStrRef>
-              <c:f>Sheet1!$A$2:$A$10</c:f>
+              <c:f>Sheet1!$A$2:$A$13</c:f>
               <c:multiLvlStrCache>
-                <c:ptCount val="9"/>
+                <c:ptCount val="12"/>
                 <c:lvl>
                   <c:pt idx="0">
                     <c:v>Jan</c:v>
@@ -4038,16 +4272,25 @@
                   <c:pt idx="8">
                     <c:v>Sep</c:v>
                   </c:pt>
+                  <c:pt idx="9">
+                    <c:v>Oct</c:v>
+                  </c:pt>
+                  <c:pt idx="10">
+                    <c:v>Nov</c:v>
+                  </c:pt>
+                  <c:pt idx="11">
+                    <c:v>Dec</c:v>
+                  </c:pt>
                 </c:lvl>
               </c:multiLvlStrCache>
             </c:multiLvlStrRef>
           </c:cat>
           <c:val>
             <c:numRef>
-              <c:f>Sheet1!$B$2:$B$10</c:f>
+              <c:f>Sheet1!$B$2:$B$13</c:f>
               <c:numCache>
                 <c:formatCode>General</c:formatCode>
-                <c:ptCount val="9"/>
+                <c:ptCount val="12"/>
                 <c:pt idx="0">
                   <c:v>369.7435897435897</c:v>
                 </c:pt>
@@ -4074,6 +4317,15 @@
                 </c:pt>
                 <c:pt idx="8">
                   <c:v>372.6542056074766</c:v>
+                </c:pt>
+                <c:pt idx="9">
+                  <c:v>395.9816513761468</c:v>
+                </c:pt>
+                <c:pt idx="10">
+                  <c:v>352.803738317757</c:v>
+                </c:pt>
+                <c:pt idx="11">
+                  <c:v>371.01869158878503</c:v>
                 </c:pt>
               </c:numCache>
             </c:numRef>
@@ -4302,9 +4554,9 @@
           </c:marker>
           <c:cat>
             <c:multiLvlStrRef>
-              <c:f>Sheet1!$A$2:$A$10</c:f>
+              <c:f>Sheet1!$A$2:$A$13</c:f>
               <c:multiLvlStrCache>
-                <c:ptCount val="9"/>
+                <c:ptCount val="12"/>
                 <c:lvl>
                   <c:pt idx="0">
                     <c:v>Jan</c:v>
@@ -4333,16 +4585,25 @@
                   <c:pt idx="8">
                     <c:v>Sep</c:v>
                   </c:pt>
+                  <c:pt idx="9">
+                    <c:v>Oct</c:v>
+                  </c:pt>
+                  <c:pt idx="10">
+                    <c:v>Nov</c:v>
+                  </c:pt>
+                  <c:pt idx="11">
+                    <c:v>Dec</c:v>
+                  </c:pt>
                 </c:lvl>
               </c:multiLvlStrCache>
             </c:multiLvlStrRef>
           </c:cat>
           <c:val>
             <c:numRef>
-              <c:f>Sheet1!$B$2:$B$10</c:f>
+              <c:f>Sheet1!$B$2:$B$13</c:f>
               <c:numCache>
                 <c:formatCode>General</c:formatCode>
-                <c:ptCount val="9"/>
+                <c:ptCount val="12"/>
                 <c:pt idx="0">
                   <c:v>369.7435897435897</c:v>
                 </c:pt>
@@ -4369,6 +4630,15 @@
                 </c:pt>
                 <c:pt idx="8">
                   <c:v>372.6542056074766</c:v>
+                </c:pt>
+                <c:pt idx="9">
+                  <c:v>395.9816513761468</c:v>
+                </c:pt>
+                <c:pt idx="10">
+                  <c:v>352.803738317757</c:v>
+                </c:pt>
+                <c:pt idx="11">
+                  <c:v>371.01869158878503</c:v>
                 </c:pt>
               </c:numCache>
             </c:numRef>
@@ -4925,9 +5195,9 @@
           </c:marker>
           <c:cat>
             <c:multiLvlStrRef>
-              <c:f>Sheet1!$A$2:$A$10</c:f>
+              <c:f>Sheet1!$A$2:$A$13</c:f>
               <c:multiLvlStrCache>
-                <c:ptCount val="9"/>
+                <c:ptCount val="12"/>
                 <c:lvl>
                   <c:pt idx="0">
                     <c:v>Jan</c:v>
@@ -4956,16 +5226,25 @@
                   <c:pt idx="8">
                     <c:v>Sep</c:v>
                   </c:pt>
+                  <c:pt idx="9">
+                    <c:v>Oct</c:v>
+                  </c:pt>
+                  <c:pt idx="10">
+                    <c:v>Nov</c:v>
+                  </c:pt>
+                  <c:pt idx="11">
+                    <c:v>Dec</c:v>
+                  </c:pt>
                 </c:lvl>
               </c:multiLvlStrCache>
             </c:multiLvlStrRef>
           </c:cat>
           <c:val>
             <c:numRef>
-              <c:f>Sheet1!$B$2:$B$10</c:f>
+              <c:f>Sheet1!$B$2:$B$13</c:f>
               <c:numCache>
                 <c:formatCode>General</c:formatCode>
-                <c:ptCount val="9"/>
+                <c:ptCount val="12"/>
                 <c:pt idx="0">
                   <c:v>12592</c:v>
                 </c:pt>
@@ -4992,6 +5271,15 @@
                 </c:pt>
                 <c:pt idx="8">
                   <c:v>11778</c:v>
+                </c:pt>
+                <c:pt idx="9">
+                  <c:v>13262</c:v>
+                </c:pt>
+                <c:pt idx="10">
+                  <c:v>11216</c:v>
+                </c:pt>
+                <c:pt idx="11">
+                  <c:v>12359</c:v>
                 </c:pt>
               </c:numCache>
             </c:numRef>
@@ -5220,9 +5508,9 @@
           </c:marker>
           <c:cat>
             <c:multiLvlStrRef>
-              <c:f>Sheet1!$A$2:$A$10</c:f>
+              <c:f>Sheet1!$A$2:$A$13</c:f>
               <c:multiLvlStrCache>
-                <c:ptCount val="9"/>
+                <c:ptCount val="12"/>
                 <c:lvl>
                   <c:pt idx="0">
                     <c:v>Jan</c:v>
@@ -5251,16 +5539,25 @@
                   <c:pt idx="8">
                     <c:v>Sep</c:v>
                   </c:pt>
+                  <c:pt idx="9">
+                    <c:v>Oct</c:v>
+                  </c:pt>
+                  <c:pt idx="10">
+                    <c:v>Nov</c:v>
+                  </c:pt>
+                  <c:pt idx="11">
+                    <c:v>Dec</c:v>
+                  </c:pt>
                 </c:lvl>
               </c:multiLvlStrCache>
             </c:multiLvlStrRef>
           </c:cat>
           <c:val>
             <c:numRef>
-              <c:f>Sheet1!$B$2:$B$10</c:f>
+              <c:f>Sheet1!$B$2:$B$13</c:f>
               <c:numCache>
                 <c:formatCode>General</c:formatCode>
-                <c:ptCount val="9"/>
+                <c:ptCount val="12"/>
                 <c:pt idx="0">
                   <c:v>12592</c:v>
                 </c:pt>
@@ -5287,6 +5584,15 @@
                 </c:pt>
                 <c:pt idx="8">
                   <c:v>11778</c:v>
+                </c:pt>
+                <c:pt idx="9">
+                  <c:v>13262</c:v>
+                </c:pt>
+                <c:pt idx="10">
+                  <c:v>11216</c:v>
+                </c:pt>
+                <c:pt idx="11">
+                  <c:v>12359</c:v>
                 </c:pt>
               </c:numCache>
             </c:numRef>
@@ -5527,9 +5833,9 @@
           </c:marker>
           <c:cat>
             <c:multiLvlStrRef>
-              <c:f>Sheet1!$A$2:$A$10</c:f>
+              <c:f>Sheet1!$A$2:$A$13</c:f>
               <c:multiLvlStrCache>
-                <c:ptCount val="9"/>
+                <c:ptCount val="12"/>
                 <c:lvl>
                   <c:pt idx="0">
                     <c:v>Jan</c:v>
@@ -5558,16 +5864,25 @@
                   <c:pt idx="8">
                     <c:v>Sep</c:v>
                   </c:pt>
+                  <c:pt idx="9">
+                    <c:v>Oct</c:v>
+                  </c:pt>
+                  <c:pt idx="10">
+                    <c:v>Nov</c:v>
+                  </c:pt>
+                  <c:pt idx="11">
+                    <c:v>Dec</c:v>
+                  </c:pt>
                 </c:lvl>
               </c:multiLvlStrCache>
             </c:multiLvlStrRef>
           </c:cat>
           <c:val>
             <c:numRef>
-              <c:f>Sheet1!$B$2:$B$10</c:f>
+              <c:f>Sheet1!$B$2:$B$13</c:f>
               <c:numCache>
                 <c:formatCode>General</c:formatCode>
-                <c:ptCount val="9"/>
+                <c:ptCount val="12"/>
                 <c:pt idx="0">
                   <c:v>165.0483870967742</c:v>
                 </c:pt>
@@ -5594,6 +5909,15 @@
                 </c:pt>
                 <c:pt idx="8">
                   <c:v>172.46058091286307</c:v>
+                </c:pt>
+                <c:pt idx="9">
+                  <c:v/>
+                </c:pt>
+                <c:pt idx="10">
+                  <c:v/>
+                </c:pt>
+                <c:pt idx="11">
+                  <c:v/>
                 </c:pt>
               </c:numCache>
             </c:numRef>
@@ -5810,9 +6134,9 @@
           </c:marker>
           <c:cat>
             <c:multiLvlStrRef>
-              <c:f>Sheet1!$A$2:$A$10</c:f>
+              <c:f>Sheet1!$A$2:$A$13</c:f>
               <c:multiLvlStrCache>
-                <c:ptCount val="9"/>
+                <c:ptCount val="12"/>
                 <c:lvl>
                   <c:pt idx="0">
                     <c:v>Jan</c:v>
@@ -5841,16 +6165,25 @@
                   <c:pt idx="8">
                     <c:v>Sep</c:v>
                   </c:pt>
+                  <c:pt idx="9">
+                    <c:v>Oct</c:v>
+                  </c:pt>
+                  <c:pt idx="10">
+                    <c:v>Nov</c:v>
+                  </c:pt>
+                  <c:pt idx="11">
+                    <c:v>Dec</c:v>
+                  </c:pt>
                 </c:lvl>
               </c:multiLvlStrCache>
             </c:multiLvlStrRef>
           </c:cat>
           <c:val>
             <c:numRef>
-              <c:f>Sheet1!$B$2:$B$10</c:f>
+              <c:f>Sheet1!$B$2:$B$13</c:f>
               <c:numCache>
                 <c:formatCode>General</c:formatCode>
-                <c:ptCount val="9"/>
+                <c:ptCount val="12"/>
                 <c:pt idx="0">
                   <c:v/>
                 </c:pt>
@@ -5877,6 +6210,15 @@
                 </c:pt>
                 <c:pt idx="8">
                   <c:v>172.46058091286307</c:v>
+                </c:pt>
+                <c:pt idx="9">
+                  <c:v/>
+                </c:pt>
+                <c:pt idx="10">
+                  <c:v/>
+                </c:pt>
+                <c:pt idx="11">
+                  <c:v/>
                 </c:pt>
               </c:numCache>
             </c:numRef>
@@ -6102,9 +6444,9 @@
           </c:marker>
           <c:cat>
             <c:multiLvlStrRef>
-              <c:f>Sheet1!$A$2:$A$10</c:f>
+              <c:f>Sheet1!$A$2:$A$13</c:f>
               <c:multiLvlStrCache>
-                <c:ptCount val="9"/>
+                <c:ptCount val="12"/>
                 <c:lvl>
                   <c:pt idx="0">
                     <c:v>Jan</c:v>
@@ -6133,16 +6475,25 @@
                   <c:pt idx="8">
                     <c:v>Sep</c:v>
                   </c:pt>
+                  <c:pt idx="9">
+                    <c:v>Oct</c:v>
+                  </c:pt>
+                  <c:pt idx="10">
+                    <c:v>Nov</c:v>
+                  </c:pt>
+                  <c:pt idx="11">
+                    <c:v>Dec</c:v>
+                  </c:pt>
                 </c:lvl>
               </c:multiLvlStrCache>
             </c:multiLvlStrRef>
           </c:cat>
           <c:val>
             <c:numRef>
-              <c:f>Sheet1!$B$2:$B$10</c:f>
+              <c:f>Sheet1!$B$2:$B$13</c:f>
               <c:numCache>
                 <c:formatCode>General</c:formatCode>
-                <c:ptCount val="9"/>
+                <c:ptCount val="12"/>
                 <c:pt idx="0">
                   <c:v>165.0483870967742</c:v>
                 </c:pt>
@@ -6168,6 +6519,15 @@
                   <c:v/>
                 </c:pt>
                 <c:pt idx="8">
+                  <c:v/>
+                </c:pt>
+                <c:pt idx="9">
+                  <c:v/>
+                </c:pt>
+                <c:pt idx="10">
+                  <c:v/>
+                </c:pt>
+                <c:pt idx="11">
                   <c:v/>
                 </c:pt>
               </c:numCache>
@@ -6394,9 +6754,9 @@
           </c:marker>
           <c:cat>
             <c:multiLvlStrRef>
-              <c:f>Sheet1!$A$2:$A$10</c:f>
+              <c:f>Sheet1!$A$2:$A$13</c:f>
               <c:multiLvlStrCache>
-                <c:ptCount val="9"/>
+                <c:ptCount val="12"/>
                 <c:lvl>
                   <c:pt idx="0">
                     <c:v>Jan</c:v>
@@ -6425,16 +6785,25 @@
                   <c:pt idx="8">
                     <c:v>Sep</c:v>
                   </c:pt>
+                  <c:pt idx="9">
+                    <c:v>Oct</c:v>
+                  </c:pt>
+                  <c:pt idx="10">
+                    <c:v>Nov</c:v>
+                  </c:pt>
+                  <c:pt idx="11">
+                    <c:v>Dec</c:v>
+                  </c:pt>
                 </c:lvl>
               </c:multiLvlStrCache>
             </c:multiLvlStrRef>
           </c:cat>
           <c:val>
             <c:numRef>
-              <c:f>Sheet1!$B$2:$B$10</c:f>
+              <c:f>Sheet1!$B$2:$B$13</c:f>
               <c:numCache>
                 <c:formatCode>General</c:formatCode>
-                <c:ptCount val="9"/>
+                <c:ptCount val="12"/>
                 <c:pt idx="0">
                   <c:v>181.76470588235293</c:v>
                 </c:pt>
@@ -6461,6 +6830,15 @@
                 </c:pt>
                 <c:pt idx="8">
                   <c:v/>
+                </c:pt>
+                <c:pt idx="9">
+                  <c:v>173.3413654618474</c:v>
+                </c:pt>
+                <c:pt idx="10">
+                  <c:v>152.834008097166</c:v>
+                </c:pt>
+                <c:pt idx="11">
+                  <c:v>159.43373493975903</c:v>
                 </c:pt>
               </c:numCache>
             </c:numRef>
@@ -6686,9 +7064,9 @@
           </c:marker>
           <c:cat>
             <c:multiLvlStrRef>
-              <c:f>Sheet1!$A$2:$A$10</c:f>
+              <c:f>Sheet1!$A$2:$A$13</c:f>
               <c:multiLvlStrCache>
-                <c:ptCount val="9"/>
+                <c:ptCount val="12"/>
                 <c:lvl>
                   <c:pt idx="0">
                     <c:v>Jan</c:v>
@@ -6717,16 +7095,25 @@
                   <c:pt idx="8">
                     <c:v>Sep</c:v>
                   </c:pt>
+                  <c:pt idx="9">
+                    <c:v>Oct</c:v>
+                  </c:pt>
+                  <c:pt idx="10">
+                    <c:v>Nov</c:v>
+                  </c:pt>
+                  <c:pt idx="11">
+                    <c:v>Dec</c:v>
+                  </c:pt>
                 </c:lvl>
               </c:multiLvlStrCache>
             </c:multiLvlStrRef>
           </c:cat>
           <c:val>
             <c:numRef>
-              <c:f>Sheet1!$B$2:$B$10</c:f>
+              <c:f>Sheet1!$B$2:$B$13</c:f>
               <c:numCache>
                 <c:formatCode>General</c:formatCode>
-                <c:ptCount val="9"/>
+                <c:ptCount val="12"/>
                 <c:pt idx="0">
                   <c:v/>
                 </c:pt>
@@ -6753,6 +7140,15 @@
                 </c:pt>
                 <c:pt idx="8">
                   <c:v>160.78225806451613</c:v>
+                </c:pt>
+                <c:pt idx="9">
+                  <c:v/>
+                </c:pt>
+                <c:pt idx="10">
+                  <c:v/>
+                </c:pt>
+                <c:pt idx="11">
+                  <c:v/>
                 </c:pt>
               </c:numCache>
             </c:numRef>
@@ -7471,7 +7867,7 @@
           <a:p>
             <a:r>
               <a:rPr lang="en-US" dirty="0"/>
-              <a:t>Source: Gross and ROs: Qlik - Productivity app (P&amp;L Total Gross Profit - Fixed Ops; CP &amp; W ROs). Headcount: ADP Employee Master extract, 10/19/2026, month-end snapshots, Qlik's fixed-employee title list. Each person counted once: someone open at two stores is counted at the old store until that record closes. Monthly averages, Jan-Sep. Same-store, INEOS excluded (opened 2026). GMC Prescott body shop gross, staff and body-only ROs excluded. Monthly CP &amp; W ROs / fixed managers. Small stores carry one to three managers, so one hire moves the ratio sharply. YTD from YTD totals, not the mean of months. Store rows reconcile to the group on every input, both years.</a:t>
+              <a:t>Source: Gross and ROs: Qlik - Productivity app (P&amp;L Total Gross Profit - Fixed Ops; CP &amp; W ROs). Headcount: ADP Employee Master extract, 10/19/2026, month-end snapshots, Qlik's fixed-employee title list. Each person counted once: someone open at two stores is counted at the old store until that record closes. Monthly averages, Jan-Sep. Same-store, INEOS excluded (opened 2026). GMC Prescott body shop gross, staff and body-only ROs excluded. Monthly CP &amp; W ROs / fixed managers. Small stores carry one to three managers, so one hire moves the ratio sharply. YTD from YTD totals, not the mean of months. Store rows reconcile to the group on every input, both years. 2025 shown January-December; October-December pulled Oct 22 on the same basis (chart only).</a:t>
             </a:r>
             <a:endParaRPr lang="en-US" dirty="0"/>
           </a:p>
@@ -7932,7 +8328,7 @@
           <a:p>
             <a:r>
               <a:rPr lang="en-US" dirty="0"/>
-              <a:t>Source: Gross and ROs: Qlik - Productivity app (P&amp;L Total Gross Profit - Fixed Ops; CP &amp; W ROs). Headcount: ADP Employee Master extract, 10/19/2026, month-end snapshots, Qlik's fixed-employee title list. Each person counted once: someone open at two stores is counted at the old store until that record closes. Monthly averages, Jan-Sep. Same-store, INEOS excluded (opened 2026). GMC Prescott body shop gross, staff and body-only ROs excluded. Monthly fixed ops gross / fixed employees. YTD from YTD totals, not the mean of months. Store rows reconcile to the group on every input, both years.</a:t>
+              <a:t>Source: Gross and ROs: Qlik - Productivity app (P&amp;L Total Gross Profit - Fixed Ops; CP &amp; W ROs). Headcount: ADP Employee Master extract, 10/19/2026, month-end snapshots, Qlik's fixed-employee title list. Each person counted once: someone open at two stores is counted at the old store until that record closes. Monthly averages, Jan-Sep. Same-store, INEOS excluded (opened 2026). GMC Prescott body shop gross, staff and body-only ROs excluded. Monthly fixed ops gross / fixed employees. YTD from YTD totals, not the mean of months. Store rows reconcile to the group on every input, both years. 2025 shown January-December; October-December pulled Oct 22 on the same basis (chart only).</a:t>
             </a:r>
             <a:endParaRPr lang="en-US" dirty="0"/>
           </a:p>
@@ -8196,7 +8592,7 @@
           <a:p>
             <a:r>
               <a:rPr lang="en-US" dirty="0"/>
-              <a:t>Source: Gross and ROs: Qlik - Productivity app (P&amp;L Total Gross Profit - Fixed Ops; CP &amp; W ROs). Headcount: ADP Employee Master extract, 10/19/2026, month-end snapshots, Qlik's fixed-employee title list. Each person counted once: someone open at two stores is counted at the old store until that record closes. Monthly averages, Jan-Sep. Same-store, INEOS excluded (opened 2026). GMC Prescott body shop gross, staff and body-only ROs excluded. Monthly CP &amp; W ROs / service advisors. YTD from YTD totals, not the mean of months. Store rows reconcile to the group on every input, both years.</a:t>
+              <a:t>Source: Gross and ROs: Qlik - Productivity app (P&amp;L Total Gross Profit - Fixed Ops; CP &amp; W ROs). Headcount: ADP Employee Master extract, 10/19/2026, month-end snapshots, Qlik's fixed-employee title list. Each person counted once: someone open at two stores is counted at the old store until that record closes. Monthly averages, Jan-Sep. Same-store, INEOS excluded (opened 2026). GMC Prescott body shop gross, staff and body-only ROs excluded. Monthly CP &amp; W ROs / service advisors. YTD from YTD totals, not the mean of months. Store rows reconcile to the group on every input, both years. 2025 shown January-December; October-December pulled Oct 22 on the same basis (chart only).</a:t>
             </a:r>
             <a:endParaRPr lang="en-US" dirty="0"/>
           </a:p>
@@ -8460,7 +8856,7 @@
           <a:p>
             <a:r>
               <a:rPr lang="en-US" dirty="0"/>
-              <a:t>Source: Gross and ROs: Qlik - Productivity app (P&amp;L Total Gross Profit - Fixed Ops; CP &amp; W ROs). Headcount: ADP Employee Master extract, 10/19/2026, month-end snapshots, Qlik's fixed-employee title list. Each person counted once: someone open at two stores is counted at the old store until that record closes. Monthly averages, Jan-Sep. Same-store, INEOS excluded (opened 2026). GMC Prescott body shop gross, staff and body-only ROs excluded. Monthly CP &amp; W ROs / fixed employees. YTD from YTD totals, not the mean of months. Store rows reconcile to the group on every input, both years.</a:t>
+              <a:t>Source: Gross and ROs: Qlik - Productivity app (P&amp;L Total Gross Profit - Fixed Ops; CP &amp; W ROs). Headcount: ADP Employee Master extract, 10/19/2026, month-end snapshots, Qlik's fixed-employee title list. Each person counted once: someone open at two stores is counted at the old store until that record closes. Monthly averages, Jan-Sep. Same-store, INEOS excluded (opened 2026). GMC Prescott body shop gross, staff and body-only ROs excluded. Monthly CP &amp; W ROs / fixed employees. YTD from YTD totals, not the mean of months. Store rows reconcile to the group on every input, both years. 2025 shown January-December; October-December pulled Oct 22 on the same basis (chart only).</a:t>
             </a:r>
             <a:endParaRPr lang="en-US" dirty="0"/>
           </a:p>

--- a/day2-deck/decks/Fixed Ops Productivity - House Style.pptx
+++ b/day2-deck/decks/Fixed Ops Productivity - House Style.pptx
@@ -4817,7 +4817,7 @@
               <c:strCache>
                 <c:ptCount val="1"/>
                 <c:pt idx="0">
-                  <c:v>Fixed employees, trailing 12 months</c:v>
+                  <c:v>2026</c:v>
                 </c:pt>
               </c:strCache>
             </c:strRef>
@@ -4852,9 +4852,8 @@
                 </a:pPr>
               </a:p>
             </c:txPr>
-            <c:dLblPos val="t"/>
             <c:showLegendKey val="0"/>
-            <c:showVal val="1"/>
+            <c:showVal val="0"/>
             <c:showCatName val="0"/>
             <c:showSerName val="0"/>
             <c:showPercent val="0"/>
@@ -4868,7 +4867,7 @@
               <a:solidFill>
                 <a:srgbClr val="2587C5"/>
               </a:solidFill>
-              <a:ln w="12700" cap="flat">
+              <a:ln w="9525" cap="flat">
                 <a:solidFill>
                   <a:srgbClr val="2587C5"/>
                 </a:solidFill>
@@ -4885,40 +4884,40 @@
                 <c:ptCount val="12"/>
                 <c:lvl>
                   <c:pt idx="0">
-                    <c:v>Oct '25</c:v>
+                    <c:v>Jan</c:v>
                   </c:pt>
                   <c:pt idx="1">
-                    <c:v>Nov '25</c:v>
+                    <c:v>Feb</c:v>
                   </c:pt>
                   <c:pt idx="2">
-                    <c:v>Dec '25</c:v>
+                    <c:v>Mar</c:v>
                   </c:pt>
                   <c:pt idx="3">
-                    <c:v>Jan '26</c:v>
+                    <c:v>Apr</c:v>
                   </c:pt>
                   <c:pt idx="4">
-                    <c:v>Feb '26</c:v>
+                    <c:v>May</c:v>
                   </c:pt>
                   <c:pt idx="5">
-                    <c:v>Mar '26</c:v>
+                    <c:v>Jun</c:v>
                   </c:pt>
                   <c:pt idx="6">
-                    <c:v>Apr '26</c:v>
+                    <c:v>Jul</c:v>
                   </c:pt>
                   <c:pt idx="7">
-                    <c:v>May '26</c:v>
+                    <c:v>Aug</c:v>
                   </c:pt>
                   <c:pt idx="8">
-                    <c:v>Jun '26</c:v>
+                    <c:v>Sep</c:v>
                   </c:pt>
                   <c:pt idx="9">
-                    <c:v>Jul '26</c:v>
+                    <c:v>Oct</c:v>
                   </c:pt>
                   <c:pt idx="10">
-                    <c:v>Aug '26</c:v>
+                    <c:v>Nov</c:v>
                   </c:pt>
                   <c:pt idx="11">
-                    <c:v>Sep '26</c:v>
+                    <c:v>Dec</c:v>
                   </c:pt>
                 </c:lvl>
               </c:multiLvlStrCache>
@@ -4931,40 +4930,651 @@
                 <c:formatCode>General</c:formatCode>
                 <c:ptCount val="12"/>
                 <c:pt idx="0">
+                  <c:v>1530</c:v>
+                </c:pt>
+                <c:pt idx="1">
+                  <c:v>1530</c:v>
+                </c:pt>
+                <c:pt idx="2">
+                  <c:v>1540</c:v>
+                </c:pt>
+                <c:pt idx="3">
+                  <c:v>1545</c:v>
+                </c:pt>
+                <c:pt idx="4">
+                  <c:v>1537</c:v>
+                </c:pt>
+                <c:pt idx="5">
+                  <c:v>1546</c:v>
+                </c:pt>
+                <c:pt idx="6">
+                  <c:v>1548</c:v>
+                </c:pt>
+                <c:pt idx="7">
+                  <c:v>1549</c:v>
+                </c:pt>
+                <c:pt idx="8">
+                  <c:v>1540</c:v>
+                </c:pt>
+                <c:pt idx="9">
+                  <c:v/>
+                </c:pt>
+                <c:pt idx="10">
+                  <c:v/>
+                </c:pt>
+                <c:pt idx="11">
+                  <c:v/>
+                </c:pt>
+              </c:numCache>
+            </c:numRef>
+          </c:val>
+          <c:smooth val="0"/>
+        </c:ser>
+        <c:dLbls>
+          <c:numFmt formatCode="#,##0" sourceLinked="0"/>
+          <c:txPr>
+            <a:bodyPr/>
+            <a:lstStyle/>
+            <a:p>
+              <a:pPr>
+                <a:defRPr b="0" i="0" strike="noStrike" sz="1400" u="none">
+                  <a:solidFill>
+                    <a:srgbClr val="1A1A1A"/>
+                  </a:solidFill>
+                  <a:latin typeface="+mn-lt"/>
+                </a:defRPr>
+              </a:pPr>
+            </a:p>
+          </c:txPr>
+          <c:showLegendKey val="0"/>
+          <c:showVal val="0"/>
+          <c:showCatName val="0"/>
+          <c:showSerName val="0"/>
+          <c:showPercent val="0"/>
+          <c:showBubbleSize val="0"/>
+          <c:showLeaderLines val="0"/>
+        </c:dLbls>
+        <c:marker val="1"/>
+        <c:axId val="2094734554"/>
+        <c:axId val="2094734552"/>
+        <c:axId val="2094734556"/>
+      </c:lineChart>
+      <c:catAx>
+        <c:axId val="2094734554"/>
+        <c:scaling>
+          <c:orientation val="minMax"/>
+        </c:scaling>
+        <c:delete val="0"/>
+        <c:axPos val="b"/>
+        <c:numFmt formatCode="General" sourceLinked="1"/>
+        <c:majorTickMark val="out"/>
+        <c:minorTickMark val="none"/>
+        <c:tickLblPos val="low"/>
+        <c:spPr>
+          <a:ln w="12700" cap="flat">
+            <a:noFill/>
+            <a:prstDash val="solid"/>
+            <a:round/>
+          </a:ln>
+        </c:spPr>
+        <c:txPr>
+          <a:bodyPr/>
+          <a:lstStyle/>
+          <a:p>
+            <a:pPr>
+              <a:defRPr sz="1400" b="0" i="0" u="none" strike="noStrike">
+                <a:solidFill>
+                  <a:srgbClr val="FFFFFF"/>
+                </a:solidFill>
+                <a:latin typeface="+mn-lt"/>
+              </a:defRPr>
+            </a:pPr>
+            <a:endParaRPr lang="en-US"/>
+          </a:p>
+        </c:txPr>
+        <c:crossAx val="2094734552"/>
+        <c:crosses val="min"/>
+        <c:auto val="1"/>
+        <c:lblAlgn val="ctr"/>
+        <c:noMultiLvlLbl val="1"/>
+      </c:catAx>
+      <c:valAx>
+        <c:axId val="2094734552"/>
+        <c:scaling>
+          <c:orientation val="minMax"/>
+          <c:max val="1700"/>
+          <c:min val="1450"/>
+        </c:scaling>
+        <c:delete val="0"/>
+        <c:axPos val="l"/>
+        <c:numFmt formatCode="#,##0" sourceLinked="0"/>
+        <c:majorTickMark val="out"/>
+        <c:minorTickMark val="none"/>
+        <c:tickLblPos val="nextTo"/>
+        <c:spPr>
+          <a:ln w="12700" cap="flat">
+            <a:noFill/>
+            <a:prstDash val="solid"/>
+            <a:round/>
+          </a:ln>
+        </c:spPr>
+        <c:txPr>
+          <a:bodyPr/>
+          <a:lstStyle/>
+          <a:p>
+            <a:pPr>
+              <a:defRPr sz="1400" b="0" i="0" u="none" strike="noStrike">
+                <a:solidFill>
+                  <a:srgbClr val="FFFFFF"/>
+                </a:solidFill>
+                <a:latin typeface="+mn-lt"/>
+              </a:defRPr>
+            </a:pPr>
+            <a:endParaRPr lang="en-US"/>
+          </a:p>
+        </c:txPr>
+        <c:crossAx val="2094734554"/>
+        <c:crosses val="autoZero"/>
+        <c:crossBetween val="between"/>
+        <c:majorUnit val="50"/>
+      </c:valAx>
+      <c:spPr>
+        <a:noFill/>
+        <a:ln>
+          <a:noFill/>
+        </a:ln>
+        <a:effectLst/>
+      </c:spPr>
+    </c:plotArea>
+    <c:plotVisOnly val="1"/>
+    <c:dispBlanksAs val="span"/>
+  </c:chart>
+  <c:spPr>
+    <a:noFill/>
+    <a:ln>
+      <a:noFill/>
+    </a:ln>
+    <a:effectLst/>
+  </c:spPr>
+  <c:externalData r:id="rId1">
+    <c:autoUpdate val="0"/>
+  </c:externalData>
+</c:chartSpace>
+</file>
+
+<file path=ppt/charts/chart24.xml><?xml version="1.0" encoding="utf-8"?>
+<c:chartSpace xmlns:c="http://schemas.openxmlformats.org/drawingml/2006/chart" xmlns:a="http://schemas.openxmlformats.org/drawingml/2006/main" xmlns:r="http://schemas.openxmlformats.org/officeDocument/2006/relationships">
+  <c:date1904 val="0"/>
+  <c:roundedCorners val="1"/>
+  <c:chart>
+    <c:autoTitleDeleted val="1"/>
+    <c:plotArea>
+      <c:layout/>
+      <c:lineChart>
+        <c:varyColors val="0"/>
+        <c:ser>
+          <c:idx val="0"/>
+          <c:order val="0"/>
+          <c:tx>
+            <c:strRef>
+              <c:f>Sheet1!$B$1</c:f>
+              <c:strCache>
+                <c:ptCount val="1"/>
+                <c:pt idx="0">
+                  <c:v>2026</c:v>
+                </c:pt>
+              </c:strCache>
+            </c:strRef>
+          </c:tx>
+          <c:spPr>
+            <a:solidFill>
+              <a:srgbClr val="2587C5"/>
+            </a:solidFill>
+            <a:ln>
+              <a:noFill/>
+            </a:ln>
+            <a:effectLst/>
+          </c:spPr>
+          <c:invertIfNegative val="0"/>
+          <c:dLbls>
+            <c:numFmt formatCode="#,##0" sourceLinked="0"/>
+            <c:txPr>
+              <a:bodyPr/>
+              <a:lstStyle/>
+              <a:p>
+                <a:pPr>
+                  <a:defRPr b="0" i="0" strike="noStrike" sz="1400" u="none">
+                    <a:solidFill>
+                      <a:srgbClr val="1A1A1A"/>
+                    </a:solidFill>
+                    <a:latin typeface="+mn-lt"/>
+                  </a:defRPr>
+                </a:pPr>
+              </a:p>
+            </c:txPr>
+            <c:dLblPos val="b"/>
+            <c:showLegendKey val="0"/>
+            <c:showVal val="1"/>
+            <c:showCatName val="0"/>
+            <c:showSerName val="0"/>
+            <c:showPercent val="0"/>
+            <c:showBubbleSize val="0"/>
+            <c:showLeaderLines val="0"/>
+          </c:dLbls>
+          <c:marker>
+            <c:symbol val="none"/>
+            <c:size val="8"/>
+            <c:spPr>
+              <a:solidFill>
+                <a:srgbClr val="2587C5"/>
+              </a:solidFill>
+              <a:ln w="9525" cap="flat">
+                <a:solidFill>
+                  <a:srgbClr val="2587C5"/>
+                </a:solidFill>
+                <a:prstDash val="solid"/>
+                <a:round/>
+              </a:ln>
+              <a:effectLst/>
+            </c:spPr>
+          </c:marker>
+          <c:cat>
+            <c:multiLvlStrRef>
+              <c:f>Sheet1!$A$2:$A$13</c:f>
+              <c:multiLvlStrCache>
+                <c:ptCount val="12"/>
+                <c:lvl>
+                  <c:pt idx="0">
+                    <c:v>Jan</c:v>
+                  </c:pt>
+                  <c:pt idx="1">
+                    <c:v>Feb</c:v>
+                  </c:pt>
+                  <c:pt idx="2">
+                    <c:v>Mar</c:v>
+                  </c:pt>
+                  <c:pt idx="3">
+                    <c:v>Apr</c:v>
+                  </c:pt>
+                  <c:pt idx="4">
+                    <c:v>May</c:v>
+                  </c:pt>
+                  <c:pt idx="5">
+                    <c:v>Jun</c:v>
+                  </c:pt>
+                  <c:pt idx="6">
+                    <c:v>Jul</c:v>
+                  </c:pt>
+                  <c:pt idx="7">
+                    <c:v>Aug</c:v>
+                  </c:pt>
+                  <c:pt idx="8">
+                    <c:v>Sep</c:v>
+                  </c:pt>
+                  <c:pt idx="9">
+                    <c:v>Oct</c:v>
+                  </c:pt>
+                  <c:pt idx="10">
+                    <c:v>Nov</c:v>
+                  </c:pt>
+                  <c:pt idx="11">
+                    <c:v>Dec</c:v>
+                  </c:pt>
+                </c:lvl>
+              </c:multiLvlStrCache>
+            </c:multiLvlStrRef>
+          </c:cat>
+          <c:val>
+            <c:numRef>
+              <c:f>Sheet1!$B$2:$B$13</c:f>
+              <c:numCache>
+                <c:formatCode>General</c:formatCode>
+                <c:ptCount val="12"/>
+                <c:pt idx="0">
+                  <c:v>1530</c:v>
+                </c:pt>
+                <c:pt idx="1">
+                  <c:v>1530</c:v>
+                </c:pt>
+                <c:pt idx="2">
+                  <c:v>1540</c:v>
+                </c:pt>
+                <c:pt idx="3">
+                  <c:v>1545</c:v>
+                </c:pt>
+                <c:pt idx="4">
+                  <c:v>1537</c:v>
+                </c:pt>
+                <c:pt idx="5">
+                  <c:v>1546</c:v>
+                </c:pt>
+                <c:pt idx="6">
+                  <c:v>1548</c:v>
+                </c:pt>
+                <c:pt idx="7">
+                  <c:v>1549</c:v>
+                </c:pt>
+                <c:pt idx="8">
+                  <c:v>1540</c:v>
+                </c:pt>
+                <c:pt idx="9">
+                  <c:v/>
+                </c:pt>
+                <c:pt idx="10">
+                  <c:v/>
+                </c:pt>
+                <c:pt idx="11">
+                  <c:v/>
+                </c:pt>
+              </c:numCache>
+            </c:numRef>
+          </c:val>
+          <c:smooth val="0"/>
+        </c:ser>
+        <c:dLbls>
+          <c:numFmt formatCode="#,##0" sourceLinked="0"/>
+          <c:txPr>
+            <a:bodyPr/>
+            <a:lstStyle/>
+            <a:p>
+              <a:pPr>
+                <a:defRPr b="0" i="0" strike="noStrike" sz="1400" u="none">
+                  <a:solidFill>
+                    <a:srgbClr val="1A1A1A"/>
+                  </a:solidFill>
+                  <a:latin typeface="+mn-lt"/>
+                </a:defRPr>
+              </a:pPr>
+            </a:p>
+          </c:txPr>
+          <c:dLblPos val="b"/>
+          <c:showLegendKey val="0"/>
+          <c:showVal val="1"/>
+          <c:showCatName val="0"/>
+          <c:showSerName val="0"/>
+          <c:showPercent val="0"/>
+          <c:showBubbleSize val="0"/>
+          <c:showLeaderLines val="0"/>
+        </c:dLbls>
+        <c:marker val="1"/>
+        <c:axId val="2094734554"/>
+        <c:axId val="2094734552"/>
+        <c:axId val="2094734556"/>
+      </c:lineChart>
+      <c:catAx>
+        <c:axId val="2094734554"/>
+        <c:scaling>
+          <c:orientation val="minMax"/>
+        </c:scaling>
+        <c:delete val="0"/>
+        <c:axPos val="b"/>
+        <c:numFmt formatCode="General" sourceLinked="1"/>
+        <c:majorTickMark val="out"/>
+        <c:minorTickMark val="none"/>
+        <c:tickLblPos val="low"/>
+        <c:spPr>
+          <a:ln w="12700" cap="flat">
+            <a:noFill/>
+            <a:prstDash val="solid"/>
+            <a:round/>
+          </a:ln>
+        </c:spPr>
+        <c:txPr>
+          <a:bodyPr/>
+          <a:lstStyle/>
+          <a:p>
+            <a:pPr>
+              <a:defRPr sz="1400" b="0" i="0" u="none" strike="noStrike">
+                <a:solidFill>
+                  <a:srgbClr val="FFFFFF"/>
+                </a:solidFill>
+                <a:latin typeface="+mn-lt"/>
+              </a:defRPr>
+            </a:pPr>
+            <a:endParaRPr lang="en-US"/>
+          </a:p>
+        </c:txPr>
+        <c:crossAx val="2094734552"/>
+        <c:crosses val="min"/>
+        <c:auto val="1"/>
+        <c:lblAlgn val="ctr"/>
+        <c:noMultiLvlLbl val="1"/>
+      </c:catAx>
+      <c:valAx>
+        <c:axId val="2094734552"/>
+        <c:scaling>
+          <c:orientation val="minMax"/>
+          <c:max val="1700"/>
+          <c:min val="1450"/>
+        </c:scaling>
+        <c:delete val="0"/>
+        <c:axPos val="l"/>
+        <c:numFmt formatCode="#,##0" sourceLinked="0"/>
+        <c:majorTickMark val="out"/>
+        <c:minorTickMark val="none"/>
+        <c:tickLblPos val="nextTo"/>
+        <c:spPr>
+          <a:ln w="12700" cap="flat">
+            <a:noFill/>
+            <a:prstDash val="solid"/>
+            <a:round/>
+          </a:ln>
+        </c:spPr>
+        <c:txPr>
+          <a:bodyPr/>
+          <a:lstStyle/>
+          <a:p>
+            <a:pPr>
+              <a:defRPr sz="1400" b="0" i="0" u="none" strike="noStrike">
+                <a:solidFill>
+                  <a:srgbClr val="FFFFFF"/>
+                </a:solidFill>
+                <a:latin typeface="+mn-lt"/>
+              </a:defRPr>
+            </a:pPr>
+            <a:endParaRPr lang="en-US"/>
+          </a:p>
+        </c:txPr>
+        <c:crossAx val="2094734554"/>
+        <c:crosses val="autoZero"/>
+        <c:crossBetween val="between"/>
+        <c:majorUnit val="50"/>
+      </c:valAx>
+      <c:spPr>
+        <a:solidFill>
+          <a:srgbClr val="FFFFFF">
+            <a:alpha val="0"/>
+          </a:srgbClr>
+        </a:solidFill>
+        <a:ln>
+          <a:noFill/>
+        </a:ln>
+        <a:effectLst/>
+      </c:spPr>
+    </c:plotArea>
+    <c:plotVisOnly val="1"/>
+    <c:dispBlanksAs val="span"/>
+  </c:chart>
+  <c:spPr>
+    <a:solidFill>
+      <a:srgbClr val="FFFFFF">
+        <a:alpha val="0"/>
+      </a:srgbClr>
+    </a:solidFill>
+    <a:ln>
+      <a:noFill/>
+    </a:ln>
+    <a:effectLst/>
+  </c:spPr>
+  <c:externalData r:id="rId1">
+    <c:autoUpdate val="0"/>
+  </c:externalData>
+</c:chartSpace>
+</file>
+
+<file path=ppt/charts/chart25.xml><?xml version="1.0" encoding="utf-8"?>
+<c:chartSpace xmlns:c="http://schemas.openxmlformats.org/drawingml/2006/chart" xmlns:a="http://schemas.openxmlformats.org/drawingml/2006/main" xmlns:r="http://schemas.openxmlformats.org/officeDocument/2006/relationships">
+  <c:date1904 val="0"/>
+  <c:roundedCorners val="1"/>
+  <c:chart>
+    <c:autoTitleDeleted val="1"/>
+    <c:plotArea>
+      <c:layout/>
+      <c:lineChart>
+        <c:varyColors val="0"/>
+        <c:ser>
+          <c:idx val="0"/>
+          <c:order val="0"/>
+          <c:tx>
+            <c:strRef>
+              <c:f>Sheet1!$B$1</c:f>
+              <c:strCache>
+                <c:ptCount val="1"/>
+                <c:pt idx="0">
+                  <c:v>2025</c:v>
+                </c:pt>
+              </c:strCache>
+            </c:strRef>
+          </c:tx>
+          <c:spPr>
+            <a:solidFill>
+              <a:srgbClr val="9AA3AD"/>
+            </a:solidFill>
+            <a:ln>
+              <a:noFill/>
+            </a:ln>
+            <a:effectLst/>
+          </c:spPr>
+          <c:invertIfNegative val="0"/>
+          <c:dLbls>
+            <c:numFmt formatCode="#,##0" sourceLinked="0"/>
+            <c:txPr>
+              <a:bodyPr/>
+              <a:lstStyle/>
+              <a:p>
+                <a:pPr>
+                  <a:defRPr b="0" i="0" strike="noStrike" sz="1400" u="none">
+                    <a:solidFill>
+                      <a:srgbClr val="1A1A1A"/>
+                    </a:solidFill>
+                    <a:latin typeface="+mn-lt"/>
+                  </a:defRPr>
+                </a:pPr>
+              </a:p>
+            </c:txPr>
+            <c:dLblPos val="t"/>
+            <c:showLegendKey val="0"/>
+            <c:showVal val="1"/>
+            <c:showCatName val="0"/>
+            <c:showSerName val="0"/>
+            <c:showPercent val="0"/>
+            <c:showBubbleSize val="0"/>
+            <c:showLeaderLines val="0"/>
+          </c:dLbls>
+          <c:marker>
+            <c:symbol val="none"/>
+            <c:size val="8"/>
+            <c:spPr>
+              <a:solidFill>
+                <a:srgbClr val="9AA3AD"/>
+              </a:solidFill>
+              <a:ln w="9525" cap="flat">
+                <a:solidFill>
+                  <a:srgbClr val="9AA3AD"/>
+                </a:solidFill>
+                <a:prstDash val="solid"/>
+                <a:round/>
+              </a:ln>
+              <a:effectLst/>
+            </c:spPr>
+          </c:marker>
+          <c:cat>
+            <c:multiLvlStrRef>
+              <c:f>Sheet1!$A$2:$A$13</c:f>
+              <c:multiLvlStrCache>
+                <c:ptCount val="12"/>
+                <c:lvl>
+                  <c:pt idx="0">
+                    <c:v>Jan</c:v>
+                  </c:pt>
+                  <c:pt idx="1">
+                    <c:v>Feb</c:v>
+                  </c:pt>
+                  <c:pt idx="2">
+                    <c:v>Mar</c:v>
+                  </c:pt>
+                  <c:pt idx="3">
+                    <c:v>Apr</c:v>
+                  </c:pt>
+                  <c:pt idx="4">
+                    <c:v>May</c:v>
+                  </c:pt>
+                  <c:pt idx="5">
+                    <c:v>Jun</c:v>
+                  </c:pt>
+                  <c:pt idx="6">
+                    <c:v>Jul</c:v>
+                  </c:pt>
+                  <c:pt idx="7">
+                    <c:v>Aug</c:v>
+                  </c:pt>
+                  <c:pt idx="8">
+                    <c:v>Sep</c:v>
+                  </c:pt>
+                  <c:pt idx="9">
+                    <c:v>Oct</c:v>
+                  </c:pt>
+                  <c:pt idx="10">
+                    <c:v>Nov</c:v>
+                  </c:pt>
+                  <c:pt idx="11">
+                    <c:v>Dec</c:v>
+                  </c:pt>
+                </c:lvl>
+              </c:multiLvlStrCache>
+            </c:multiLvlStrRef>
+          </c:cat>
+          <c:val>
+            <c:numRef>
+              <c:f>Sheet1!$B$2:$B$13</c:f>
+              <c:numCache>
+                <c:formatCode>General</c:formatCode>
+                <c:ptCount val="12"/>
+                <c:pt idx="0">
+                  <c:v>1625</c:v>
+                </c:pt>
+                <c:pt idx="1">
+                  <c:v>1632</c:v>
+                </c:pt>
+                <c:pt idx="2">
+                  <c:v>1629</c:v>
+                </c:pt>
+                <c:pt idx="3">
+                  <c:v>1615</c:v>
+                </c:pt>
+                <c:pt idx="4">
+                  <c:v>1623</c:v>
+                </c:pt>
+                <c:pt idx="5">
+                  <c:v>1616</c:v>
+                </c:pt>
+                <c:pt idx="6">
+                  <c:v>1629</c:v>
+                </c:pt>
+                <c:pt idx="7">
+                  <c:v>1627</c:v>
+                </c:pt>
+                <c:pt idx="8">
+                  <c:v>1616</c:v>
+                </c:pt>
+                <c:pt idx="9">
                   <c:v>1604</c:v>
                 </c:pt>
-                <c:pt idx="1">
+                <c:pt idx="10">
                   <c:v>1582</c:v>
                 </c:pt>
-                <c:pt idx="2">
+                <c:pt idx="11">
                   <c:v>1563</c:v>
-                </c:pt>
-                <c:pt idx="3">
-                  <c:v>1530</c:v>
-                </c:pt>
-                <c:pt idx="4">
-                  <c:v>1530</c:v>
-                </c:pt>
-                <c:pt idx="5">
-                  <c:v>1540</c:v>
-                </c:pt>
-                <c:pt idx="6">
-                  <c:v>1545</c:v>
-                </c:pt>
-                <c:pt idx="7">
-                  <c:v>1537</c:v>
-                </c:pt>
-                <c:pt idx="8">
-                  <c:v>1546</c:v>
-                </c:pt>
-                <c:pt idx="9">
-                  <c:v>1548</c:v>
-                </c:pt>
-                <c:pt idx="10">
-                  <c:v>1549</c:v>
-                </c:pt>
-                <c:pt idx="11">
-                  <c:v>1540</c:v>
                 </c:pt>
               </c:numCache>
             </c:numRef>
@@ -5014,6 +5624,318 @@
         <c:tickLblPos val="low"/>
         <c:spPr>
           <a:ln w="12700" cap="flat">
+            <a:noFill/>
+            <a:prstDash val="solid"/>
+            <a:round/>
+          </a:ln>
+        </c:spPr>
+        <c:txPr>
+          <a:bodyPr/>
+          <a:lstStyle/>
+          <a:p>
+            <a:pPr>
+              <a:defRPr sz="1400" b="0" i="0" u="none" strike="noStrike">
+                <a:solidFill>
+                  <a:srgbClr val="FFFFFF"/>
+                </a:solidFill>
+                <a:latin typeface="+mn-lt"/>
+              </a:defRPr>
+            </a:pPr>
+            <a:endParaRPr lang="en-US"/>
+          </a:p>
+        </c:txPr>
+        <c:crossAx val="2094734552"/>
+        <c:crosses val="min"/>
+        <c:auto val="1"/>
+        <c:lblAlgn val="ctr"/>
+        <c:noMultiLvlLbl val="1"/>
+      </c:catAx>
+      <c:valAx>
+        <c:axId val="2094734552"/>
+        <c:scaling>
+          <c:orientation val="minMax"/>
+          <c:max val="1700"/>
+          <c:min val="1450"/>
+        </c:scaling>
+        <c:delete val="0"/>
+        <c:axPos val="l"/>
+        <c:numFmt formatCode="#,##0" sourceLinked="0"/>
+        <c:majorTickMark val="out"/>
+        <c:minorTickMark val="none"/>
+        <c:tickLblPos val="nextTo"/>
+        <c:spPr>
+          <a:ln w="12700" cap="flat">
+            <a:noFill/>
+            <a:prstDash val="solid"/>
+            <a:round/>
+          </a:ln>
+        </c:spPr>
+        <c:txPr>
+          <a:bodyPr/>
+          <a:lstStyle/>
+          <a:p>
+            <a:pPr>
+              <a:defRPr sz="1400" b="0" i="0" u="none" strike="noStrike">
+                <a:solidFill>
+                  <a:srgbClr val="FFFFFF"/>
+                </a:solidFill>
+                <a:latin typeface="+mn-lt"/>
+              </a:defRPr>
+            </a:pPr>
+            <a:endParaRPr lang="en-US"/>
+          </a:p>
+        </c:txPr>
+        <c:crossAx val="2094734554"/>
+        <c:crosses val="autoZero"/>
+        <c:crossBetween val="between"/>
+        <c:majorUnit val="50"/>
+      </c:valAx>
+      <c:spPr>
+        <a:solidFill>
+          <a:srgbClr val="FFFFFF">
+            <a:alpha val="0"/>
+          </a:srgbClr>
+        </a:solidFill>
+        <a:ln>
+          <a:noFill/>
+        </a:ln>
+        <a:effectLst/>
+      </c:spPr>
+    </c:plotArea>
+    <c:plotVisOnly val="1"/>
+    <c:dispBlanksAs val="span"/>
+  </c:chart>
+  <c:spPr>
+    <a:solidFill>
+      <a:srgbClr val="FFFFFF">
+        <a:alpha val="0"/>
+      </a:srgbClr>
+    </a:solidFill>
+    <a:ln>
+      <a:noFill/>
+    </a:ln>
+    <a:effectLst/>
+  </c:spPr>
+  <c:externalData r:id="rId1">
+    <c:autoUpdate val="0"/>
+  </c:externalData>
+</c:chartSpace>
+</file>
+
+<file path=ppt/charts/chart26.xml><?xml version="1.0" encoding="utf-8"?>
+<c:chartSpace xmlns:c="http://schemas.openxmlformats.org/drawingml/2006/chart" xmlns:a="http://schemas.openxmlformats.org/drawingml/2006/main" xmlns:r="http://schemas.openxmlformats.org/officeDocument/2006/relationships">
+  <c:date1904 val="0"/>
+  <c:roundedCorners val="1"/>
+  <c:chart>
+    <c:autoTitleDeleted val="1"/>
+    <c:plotArea>
+      <c:layout/>
+      <c:lineChart>
+        <c:varyColors val="0"/>
+        <c:ser>
+          <c:idx val="0"/>
+          <c:order val="0"/>
+          <c:tx>
+            <c:strRef>
+              <c:f>Sheet1!$B$1</c:f>
+              <c:strCache>
+                <c:ptCount val="1"/>
+                <c:pt idx="0">
+                  <c:v>2025</c:v>
+                </c:pt>
+              </c:strCache>
+            </c:strRef>
+          </c:tx>
+          <c:spPr>
+            <a:solidFill>
+              <a:srgbClr val="9AA3AD"/>
+            </a:solidFill>
+            <a:ln w="38100" cap="flat">
+              <a:solidFill>
+                <a:srgbClr val="9AA3AD"/>
+              </a:solidFill>
+              <a:prstDash val="solid"/>
+              <a:round/>
+            </a:ln>
+            <a:effectLst/>
+          </c:spPr>
+          <c:invertIfNegative val="0"/>
+          <c:dLbls>
+            <c:numFmt formatCode="#,##0" sourceLinked="0"/>
+            <c:txPr>
+              <a:bodyPr/>
+              <a:lstStyle/>
+              <a:p>
+                <a:pPr>
+                  <a:defRPr b="0" i="0" strike="noStrike" sz="1400" u="none">
+                    <a:solidFill>
+                      <a:srgbClr val="1A1A1A"/>
+                    </a:solidFill>
+                    <a:latin typeface="+mn-lt"/>
+                  </a:defRPr>
+                </a:pPr>
+              </a:p>
+            </c:txPr>
+            <c:showLegendKey val="0"/>
+            <c:showVal val="0"/>
+            <c:showCatName val="0"/>
+            <c:showSerName val="0"/>
+            <c:showPercent val="0"/>
+            <c:showBubbleSize val="0"/>
+            <c:showLeaderLines val="0"/>
+          </c:dLbls>
+          <c:marker>
+            <c:symbol val="circle"/>
+            <c:size val="8"/>
+            <c:spPr>
+              <a:solidFill>
+                <a:srgbClr val="9AA3AD"/>
+              </a:solidFill>
+              <a:ln w="9525" cap="flat">
+                <a:solidFill>
+                  <a:srgbClr val="9AA3AD"/>
+                </a:solidFill>
+                <a:prstDash val="solid"/>
+                <a:round/>
+              </a:ln>
+              <a:effectLst/>
+            </c:spPr>
+          </c:marker>
+          <c:cat>
+            <c:multiLvlStrRef>
+              <c:f>Sheet1!$A$2:$A$13</c:f>
+              <c:multiLvlStrCache>
+                <c:ptCount val="12"/>
+                <c:lvl>
+                  <c:pt idx="0">
+                    <c:v>Jan</c:v>
+                  </c:pt>
+                  <c:pt idx="1">
+                    <c:v>Feb</c:v>
+                  </c:pt>
+                  <c:pt idx="2">
+                    <c:v>Mar</c:v>
+                  </c:pt>
+                  <c:pt idx="3">
+                    <c:v>Apr</c:v>
+                  </c:pt>
+                  <c:pt idx="4">
+                    <c:v>May</c:v>
+                  </c:pt>
+                  <c:pt idx="5">
+                    <c:v>Jun</c:v>
+                  </c:pt>
+                  <c:pt idx="6">
+                    <c:v>Jul</c:v>
+                  </c:pt>
+                  <c:pt idx="7">
+                    <c:v>Aug</c:v>
+                  </c:pt>
+                  <c:pt idx="8">
+                    <c:v>Sep</c:v>
+                  </c:pt>
+                  <c:pt idx="9">
+                    <c:v>Oct</c:v>
+                  </c:pt>
+                  <c:pt idx="10">
+                    <c:v>Nov</c:v>
+                  </c:pt>
+                  <c:pt idx="11">
+                    <c:v>Dec</c:v>
+                  </c:pt>
+                </c:lvl>
+              </c:multiLvlStrCache>
+            </c:multiLvlStrRef>
+          </c:cat>
+          <c:val>
+            <c:numRef>
+              <c:f>Sheet1!$B$2:$B$13</c:f>
+              <c:numCache>
+                <c:formatCode>General</c:formatCode>
+                <c:ptCount val="12"/>
+                <c:pt idx="0">
+                  <c:v>1625</c:v>
+                </c:pt>
+                <c:pt idx="1">
+                  <c:v>1632</c:v>
+                </c:pt>
+                <c:pt idx="2">
+                  <c:v>1629</c:v>
+                </c:pt>
+                <c:pt idx="3">
+                  <c:v>1615</c:v>
+                </c:pt>
+                <c:pt idx="4">
+                  <c:v>1623</c:v>
+                </c:pt>
+                <c:pt idx="5">
+                  <c:v>1616</c:v>
+                </c:pt>
+                <c:pt idx="6">
+                  <c:v>1629</c:v>
+                </c:pt>
+                <c:pt idx="7">
+                  <c:v>1627</c:v>
+                </c:pt>
+                <c:pt idx="8">
+                  <c:v>1616</c:v>
+                </c:pt>
+                <c:pt idx="9">
+                  <c:v>1604</c:v>
+                </c:pt>
+                <c:pt idx="10">
+                  <c:v>1582</c:v>
+                </c:pt>
+                <c:pt idx="11">
+                  <c:v>1563</c:v>
+                </c:pt>
+              </c:numCache>
+            </c:numRef>
+          </c:val>
+          <c:smooth val="0"/>
+        </c:ser>
+        <c:dLbls>
+          <c:numFmt formatCode="#,##0" sourceLinked="0"/>
+          <c:txPr>
+            <a:bodyPr/>
+            <a:lstStyle/>
+            <a:p>
+              <a:pPr>
+                <a:defRPr b="0" i="0" strike="noStrike" sz="1400" u="none">
+                  <a:solidFill>
+                    <a:srgbClr val="1A1A1A"/>
+                  </a:solidFill>
+                  <a:latin typeface="+mn-lt"/>
+                </a:defRPr>
+              </a:pPr>
+            </a:p>
+          </c:txPr>
+          <c:showLegendKey val="0"/>
+          <c:showVal val="0"/>
+          <c:showCatName val="0"/>
+          <c:showSerName val="0"/>
+          <c:showPercent val="0"/>
+          <c:showBubbleSize val="0"/>
+          <c:showLeaderLines val="0"/>
+        </c:dLbls>
+        <c:marker val="1"/>
+        <c:axId val="2094734554"/>
+        <c:axId val="2094734552"/>
+        <c:axId val="2094734556"/>
+      </c:lineChart>
+      <c:catAx>
+        <c:axId val="2094734554"/>
+        <c:scaling>
+          <c:orientation val="minMax"/>
+        </c:scaling>
+        <c:delete val="0"/>
+        <c:axPos val="b"/>
+        <c:numFmt formatCode="General" sourceLinked="1"/>
+        <c:majorTickMark val="out"/>
+        <c:minorTickMark val="none"/>
+        <c:tickLblPos val="low"/>
+        <c:spPr>
+          <a:ln w="12700" cap="flat">
             <a:solidFill>
               <a:srgbClr val="888888"/>
             </a:solidFill>
@@ -5037,7 +5959,7 @@
           </a:p>
         </c:txPr>
         <c:crossAx val="2094734552"/>
-        <c:crosses val="autoZero"/>
+        <c:crosses val="min"/>
         <c:auto val="1"/>
         <c:lblAlgn val="ctr"/>
         <c:noMultiLvlLbl val="1"/>
@@ -5046,8 +5968,8 @@
         <c:axId val="2094734552"/>
         <c:scaling>
           <c:orientation val="minMax"/>
-          <c:max val="1620"/>
-          <c:min val="1520"/>
+          <c:max val="1700"/>
+          <c:min val="1450"/>
         </c:scaling>
         <c:delete val="0"/>
         <c:axPos val="l"/>
@@ -5091,10 +6013,14 @@
         <c:crossAx val="2094734554"/>
         <c:crosses val="autoZero"/>
         <c:crossBetween val="between"/>
-        <c:majorUnit val="20"/>
+        <c:majorUnit val="50"/>
       </c:valAx>
       <c:spPr>
-        <a:noFill/>
+        <a:solidFill>
+          <a:srgbClr val="FFFFFF">
+            <a:alpha val="0"/>
+          </a:srgbClr>
+        </a:solidFill>
         <a:ln>
           <a:noFill/>
         </a:ln>
@@ -5105,7 +6031,11 @@
     <c:dispBlanksAs val="span"/>
   </c:chart>
   <c:spPr>
-    <a:noFill/>
+    <a:solidFill>
+      <a:srgbClr val="FFFFFF">
+        <a:alpha val="0"/>
+      </a:srgbClr>
+    </a:solidFill>
     <a:ln>
       <a:noFill/>
     </a:ln>
@@ -8131,7 +9061,7 @@
           <a:p>
             <a:r>
               <a:rPr lang="en-US" dirty="0"/>
-              <a:t>Source: Gross and ROs: Qlik - Productivity app (P&amp;L Total Gross Profit - Fixed Ops; CP &amp; W ROs). Headcount: ADP Employee Master extract, 10/19/2026, month-end snapshots, Qlik's fixed-employee title list. Each person counted once: someone open at two stores is counted at the old store until that record closes. Monthly averages, Jan-Sep. Same-store, INEOS excluded (opened 2026). GMC Prescott body shop gross, staff and body-only ROs excluded. Fixed employees include managers; technicians = service, express, foreman and team-leader titles.
+              <a:t>Source: Gross and ROs: Qlik - Productivity app (P&amp;L Total Gross Profit - Fixed Ops; CP &amp; W ROs). Headcount: ADP Employee Master extract, 10/19/2026, month-end snapshots, Qlik's fixed-employee title list. Each person counted once: someone open at two stores is counted at the old store until that record closes. Monthly averages, Jan-Sep. Same-store, INEOS excluded (opened 2026). GMC Prescott body shop gross, staff and body-only ROs excluded. YTD = average month-end fixed headcount, Jan-Sep. Fixed employees include managers; technicians = service, express, foreman and team-leader titles. 2025 shown January-December.
 Jan 25: 1625 fixed, 703 techs, 238 advisors, 117 managers
 Feb 25: 1632 fixed, 705 techs, 237 advisors, 116 managers
 Mar 25: 1629 fixed, 702 techs, 240 advisors, 116 managers
@@ -26107,7 +27037,7 @@
         <p:spPr>
           <a:xfrm>
             <a:off x="457200" y="1207008"/>
-            <a:ext cx="7589520" cy="4782312"/>
+            <a:ext cx="11274552" cy="1005840"/>
           </a:xfrm>
           <a:prstGeom prst="rect">
             <a:avLst/>
@@ -26126,8 +27056,8 @@
         </p:nvSpPr>
         <p:spPr>
           <a:xfrm>
-            <a:off x="685800" y="1344168"/>
-            <a:ext cx="7132320" cy="292608"/>
+            <a:off x="685800" y="1335024"/>
+            <a:ext cx="2651760" cy="237744"/>
           </a:xfrm>
           <a:prstGeom prst="rect">
             <a:avLst/>
@@ -26143,6 +27073,338 @@
               <a:buNone/>
             </a:pPr>
             <a:r>
+              <a:rPr lang="en-US" sz="1400" spc="90" kern="0" dirty="0">
+                <a:solidFill>
+                  <a:srgbClr val="595959"/>
+                </a:solidFill>
+                <a:latin typeface="Inter" pitchFamily="34" charset="0"/>
+                <a:ea typeface="Inter" pitchFamily="34" charset="-122"/>
+                <a:cs typeface="Inter" pitchFamily="34" charset="-120"/>
+              </a:rPr>
+              <a:t>2025 YTD</a:t>
+            </a:r>
+            <a:endParaRPr lang="en-US" sz="1400" dirty="0"/>
+          </a:p>
+        </p:txBody>
+      </p:sp>
+      <p:sp>
+        <p:nvSpPr>
+          <p:cNvPr id="7" name="Text 5"/>
+          <p:cNvSpPr txBox="1"/>
+          <p:nvPr/>
+        </p:nvSpPr>
+        <p:spPr>
+          <a:xfrm>
+            <a:off x="685800" y="1554480"/>
+            <a:ext cx="2697480" cy="548640"/>
+          </a:xfrm>
+          <a:prstGeom prst="rect">
+            <a:avLst/>
+          </a:prstGeom>
+          <a:noFill/>
+          <a:ln/>
+        </p:spPr>
+        <p:txBody>
+          <a:bodyPr wrap="square" lIns="0" tIns="0" rIns="0" bIns="0" rtlCol="0" anchor="ctr"/>
+          <a:lstStyle/>
+          <a:p>
+            <a:pPr indent="0" marL="0">
+              <a:buNone/>
+            </a:pPr>
+            <a:r>
+              <a:rPr lang="en-US" sz="3000" b="1" dirty="0">
+                <a:solidFill>
+                  <a:srgbClr val="1A1A1A"/>
+                </a:solidFill>
+                <a:latin typeface="Inter" pitchFamily="34" charset="0"/>
+                <a:ea typeface="Inter" pitchFamily="34" charset="-122"/>
+                <a:cs typeface="Inter" pitchFamily="34" charset="-120"/>
+              </a:rPr>
+              <a:t>1,624</a:t>
+            </a:r>
+            <a:endParaRPr lang="en-US" sz="3000" dirty="0"/>
+          </a:p>
+        </p:txBody>
+      </p:sp>
+      <p:sp>
+        <p:nvSpPr>
+          <p:cNvPr id="8" name="Text 6"/>
+          <p:cNvSpPr txBox="1"/>
+          <p:nvPr/>
+        </p:nvSpPr>
+        <p:spPr>
+          <a:xfrm>
+            <a:off x="3474720" y="1335024"/>
+            <a:ext cx="2651760" cy="237744"/>
+          </a:xfrm>
+          <a:prstGeom prst="rect">
+            <a:avLst/>
+          </a:prstGeom>
+          <a:noFill/>
+          <a:ln/>
+        </p:spPr>
+        <p:txBody>
+          <a:bodyPr wrap="square" lIns="0" tIns="0" rIns="0" bIns="0" rtlCol="0" anchor="ctr"/>
+          <a:lstStyle/>
+          <a:p>
+            <a:pPr indent="0" marL="0">
+              <a:buNone/>
+            </a:pPr>
+            <a:r>
+              <a:rPr lang="en-US" sz="1400" spc="90" kern="0" dirty="0">
+                <a:solidFill>
+                  <a:srgbClr val="595959"/>
+                </a:solidFill>
+                <a:latin typeface="Inter" pitchFamily="34" charset="0"/>
+                <a:ea typeface="Inter" pitchFamily="34" charset="-122"/>
+                <a:cs typeface="Inter" pitchFamily="34" charset="-120"/>
+              </a:rPr>
+              <a:t>2026 YTD</a:t>
+            </a:r>
+            <a:endParaRPr lang="en-US" sz="1400" dirty="0"/>
+          </a:p>
+        </p:txBody>
+      </p:sp>
+      <p:sp>
+        <p:nvSpPr>
+          <p:cNvPr id="9" name="Text 7"/>
+          <p:cNvSpPr txBox="1"/>
+          <p:nvPr/>
+        </p:nvSpPr>
+        <p:spPr>
+          <a:xfrm>
+            <a:off x="3474720" y="1554480"/>
+            <a:ext cx="2697480" cy="548640"/>
+          </a:xfrm>
+          <a:prstGeom prst="rect">
+            <a:avLst/>
+          </a:prstGeom>
+          <a:noFill/>
+          <a:ln/>
+        </p:spPr>
+        <p:txBody>
+          <a:bodyPr wrap="square" lIns="0" tIns="0" rIns="0" bIns="0" rtlCol="0" anchor="ctr"/>
+          <a:lstStyle/>
+          <a:p>
+            <a:pPr indent="0" marL="0">
+              <a:buNone/>
+            </a:pPr>
+            <a:r>
+              <a:rPr lang="en-US" sz="3000" b="1" dirty="0">
+                <a:solidFill>
+                  <a:srgbClr val="1A1A1A"/>
+                </a:solidFill>
+                <a:latin typeface="Inter" pitchFamily="34" charset="0"/>
+                <a:ea typeface="Inter" pitchFamily="34" charset="-122"/>
+                <a:cs typeface="Inter" pitchFamily="34" charset="-120"/>
+              </a:rPr>
+              <a:t>1,541</a:t>
+            </a:r>
+            <a:endParaRPr lang="en-US" sz="3000" dirty="0"/>
+          </a:p>
+        </p:txBody>
+      </p:sp>
+      <p:sp>
+        <p:nvSpPr>
+          <p:cNvPr id="10" name="Text 8"/>
+          <p:cNvSpPr txBox="1"/>
+          <p:nvPr/>
+        </p:nvSpPr>
+        <p:spPr>
+          <a:xfrm>
+            <a:off x="6263640" y="1335024"/>
+            <a:ext cx="2651760" cy="237744"/>
+          </a:xfrm>
+          <a:prstGeom prst="rect">
+            <a:avLst/>
+          </a:prstGeom>
+          <a:noFill/>
+          <a:ln/>
+        </p:spPr>
+        <p:txBody>
+          <a:bodyPr wrap="square" lIns="0" tIns="0" rIns="0" bIns="0" rtlCol="0" anchor="ctr"/>
+          <a:lstStyle/>
+          <a:p>
+            <a:pPr indent="0" marL="0">
+              <a:buNone/>
+            </a:pPr>
+            <a:r>
+              <a:rPr lang="en-US" sz="1400" spc="90" kern="0" dirty="0">
+                <a:solidFill>
+                  <a:srgbClr val="595959"/>
+                </a:solidFill>
+                <a:latin typeface="Inter" pitchFamily="34" charset="0"/>
+                <a:ea typeface="Inter" pitchFamily="34" charset="-122"/>
+                <a:cs typeface="Inter" pitchFamily="34" charset="-120"/>
+              </a:rPr>
+              <a:t>VARIANCE</a:t>
+            </a:r>
+            <a:endParaRPr lang="en-US" sz="1400" dirty="0"/>
+          </a:p>
+        </p:txBody>
+      </p:sp>
+      <p:sp>
+        <p:nvSpPr>
+          <p:cNvPr id="11" name="Text 9"/>
+          <p:cNvSpPr txBox="1"/>
+          <p:nvPr/>
+        </p:nvSpPr>
+        <p:spPr>
+          <a:xfrm>
+            <a:off x="6263640" y="1554480"/>
+            <a:ext cx="2697480" cy="548640"/>
+          </a:xfrm>
+          <a:prstGeom prst="rect">
+            <a:avLst/>
+          </a:prstGeom>
+          <a:noFill/>
+          <a:ln/>
+        </p:spPr>
+        <p:txBody>
+          <a:bodyPr wrap="square" lIns="0" tIns="0" rIns="0" bIns="0" rtlCol="0" anchor="ctr"/>
+          <a:lstStyle/>
+          <a:p>
+            <a:pPr indent="0" marL="0">
+              <a:buNone/>
+            </a:pPr>
+            <a:r>
+              <a:rPr lang="en-US" sz="3000" b="1" dirty="0">
+                <a:solidFill>
+                  <a:srgbClr val="0B2C4A"/>
+                </a:solidFill>
+                <a:latin typeface="Inter" pitchFamily="34" charset="0"/>
+                <a:ea typeface="Inter" pitchFamily="34" charset="-122"/>
+                <a:cs typeface="Inter" pitchFamily="34" charset="-120"/>
+              </a:rPr>
+              <a:t>−83</a:t>
+            </a:r>
+            <a:endParaRPr lang="en-US" sz="3000" dirty="0"/>
+          </a:p>
+        </p:txBody>
+      </p:sp>
+      <p:sp>
+        <p:nvSpPr>
+          <p:cNvPr id="12" name="Text 10"/>
+          <p:cNvSpPr txBox="1"/>
+          <p:nvPr/>
+        </p:nvSpPr>
+        <p:spPr>
+          <a:xfrm>
+            <a:off x="9052560" y="1335024"/>
+            <a:ext cx="2651760" cy="237744"/>
+          </a:xfrm>
+          <a:prstGeom prst="rect">
+            <a:avLst/>
+          </a:prstGeom>
+          <a:noFill/>
+          <a:ln/>
+        </p:spPr>
+        <p:txBody>
+          <a:bodyPr wrap="square" lIns="0" tIns="0" rIns="0" bIns="0" rtlCol="0" anchor="ctr"/>
+          <a:lstStyle/>
+          <a:p>
+            <a:pPr indent="0" marL="0">
+              <a:buNone/>
+            </a:pPr>
+            <a:r>
+              <a:rPr lang="en-US" sz="1400" spc="90" kern="0" dirty="0">
+                <a:solidFill>
+                  <a:srgbClr val="595959"/>
+                </a:solidFill>
+                <a:latin typeface="Inter" pitchFamily="34" charset="0"/>
+                <a:ea typeface="Inter" pitchFamily="34" charset="-122"/>
+                <a:cs typeface="Inter" pitchFamily="34" charset="-120"/>
+              </a:rPr>
+              <a:t>VAR %</a:t>
+            </a:r>
+            <a:endParaRPr lang="en-US" sz="1400" dirty="0"/>
+          </a:p>
+        </p:txBody>
+      </p:sp>
+      <p:sp>
+        <p:nvSpPr>
+          <p:cNvPr id="13" name="Text 11"/>
+          <p:cNvSpPr txBox="1"/>
+          <p:nvPr/>
+        </p:nvSpPr>
+        <p:spPr>
+          <a:xfrm>
+            <a:off x="9052560" y="1554480"/>
+            <a:ext cx="2697480" cy="548640"/>
+          </a:xfrm>
+          <a:prstGeom prst="rect">
+            <a:avLst/>
+          </a:prstGeom>
+          <a:noFill/>
+          <a:ln/>
+        </p:spPr>
+        <p:txBody>
+          <a:bodyPr wrap="square" lIns="0" tIns="0" rIns="0" bIns="0" rtlCol="0" anchor="ctr"/>
+          <a:lstStyle/>
+          <a:p>
+            <a:pPr indent="0" marL="0">
+              <a:buNone/>
+            </a:pPr>
+            <a:r>
+              <a:rPr lang="en-US" sz="3000" b="1" dirty="0">
+                <a:solidFill>
+                  <a:srgbClr val="0B2C4A"/>
+                </a:solidFill>
+                <a:latin typeface="Inter" pitchFamily="34" charset="0"/>
+                <a:ea typeface="Inter" pitchFamily="34" charset="-122"/>
+                <a:cs typeface="Inter" pitchFamily="34" charset="-120"/>
+              </a:rPr>
+              <a:t>−5.1%</a:t>
+            </a:r>
+            <a:endParaRPr lang="en-US" sz="3000" dirty="0"/>
+          </a:p>
+        </p:txBody>
+      </p:sp>
+      <p:sp>
+        <p:nvSpPr>
+          <p:cNvPr id="14" name="Shape 12"/>
+          <p:cNvSpPr/>
+          <p:nvPr/>
+        </p:nvSpPr>
+        <p:spPr>
+          <a:xfrm>
+            <a:off x="457200" y="2322576"/>
+            <a:ext cx="11274552" cy="3666744"/>
+          </a:xfrm>
+          <a:prstGeom prst="rect">
+            <a:avLst/>
+          </a:prstGeom>
+          <a:solidFill>
+            <a:srgbClr val="FFFFFF"/>
+          </a:solidFill>
+          <a:ln/>
+        </p:spPr>
+      </p:sp>
+      <p:sp>
+        <p:nvSpPr>
+          <p:cNvPr id="15" name="Text 13"/>
+          <p:cNvSpPr txBox="1"/>
+          <p:nvPr/>
+        </p:nvSpPr>
+        <p:spPr>
+          <a:xfrm>
+            <a:off x="685800" y="2459736"/>
+            <a:ext cx="10817352" cy="292608"/>
+          </a:xfrm>
+          <a:prstGeom prst="rect">
+            <a:avLst/>
+          </a:prstGeom>
+          <a:noFill/>
+          <a:ln/>
+        </p:spPr>
+        <p:txBody>
+          <a:bodyPr wrap="square" lIns="0" tIns="0" rIns="0" bIns="0" rtlCol="0" anchor="ctr"/>
+          <a:lstStyle/>
+          <a:p>
+            <a:pPr indent="0" marL="0">
+              <a:buNone/>
+            </a:pPr>
+            <a:r>
               <a:rPr lang="en-US" sz="1500" dirty="0">
                 <a:solidFill>
                   <a:srgbClr val="1A1A1A"/>
@@ -26151,7 +27413,7 @@
                 <a:ea typeface="Inter" pitchFamily="34" charset="-122"/>
                 <a:cs typeface="Inter" pitchFamily="34" charset="-120"/>
               </a:rPr>
-              <a:t>Fixed employees, trailing 12 months</a:t>
+              <a:t>Fixed employees at month end, 2025 against 2026</a:t>
             </a:r>
             <a:endParaRPr lang="en-US" sz="1500" dirty="0"/>
           </a:p>
@@ -26159,14 +27421,14 @@
       </p:sp>
       <p:sp>
         <p:nvSpPr>
-          <p:cNvPr id="7" name="Shape 5"/>
+          <p:cNvPr id="16" name="Shape 14"/>
           <p:cNvSpPr/>
           <p:nvPr/>
         </p:nvSpPr>
         <p:spPr>
           <a:xfrm>
-            <a:off x="685800" y="1691640"/>
-            <a:ext cx="7132320" cy="10973"/>
+            <a:off x="685800" y="2807208"/>
+            <a:ext cx="10817352" cy="10973"/>
           </a:xfrm>
           <a:prstGeom prst="rect">
             <a:avLst/>
@@ -26179,13 +27441,13 @@
       </p:sp>
       <p:graphicFrame>
         <p:nvGraphicFramePr>
-          <p:cNvPr id="8" name="Chart 0" descr=""/>
+          <p:cNvPr id="17" name="Chart 0" descr=""/>
           <p:cNvGraphicFramePr/>
           <p:nvPr/>
         </p:nvGraphicFramePr>
         <p:xfrm>
-          <a:off x="621792" y="1810512"/>
-          <a:ext cx="6858000" cy="4023360"/>
+          <a:off x="621792" y="3218688"/>
+          <a:ext cx="10945368" cy="2679192"/>
         </p:xfrm>
         <a:graphic xmlns:a="http://schemas.openxmlformats.org/drawingml/2006/main">
           <a:graphicData uri="http://schemas.openxmlformats.org/drawingml/2006/chart">
@@ -26193,36 +27455,104 @@
           </a:graphicData>
         </a:graphic>
       </p:graphicFrame>
-      <p:sp>
-        <p:nvSpPr>
-          <p:cNvPr id="9" name="Shape 6"/>
+      <p:graphicFrame>
+        <p:nvGraphicFramePr>
+          <p:cNvPr id="18" name="Chart 1" descr=""/>
+          <p:cNvGraphicFramePr/>
+          <p:nvPr/>
+        </p:nvGraphicFramePr>
+        <p:xfrm>
+          <a:off x="621792" y="3218688"/>
+          <a:ext cx="10945368" cy="2679192"/>
+        </p:xfrm>
+        <a:graphic xmlns:a="http://schemas.openxmlformats.org/drawingml/2006/main">
+          <a:graphicData uri="http://schemas.openxmlformats.org/drawingml/2006/chart">
+            <c:chart xmlns:c="http://schemas.openxmlformats.org/drawingml/2006/chart" r:id="rId2"/>
+          </a:graphicData>
+        </a:graphic>
+      </p:graphicFrame>
+      <p:graphicFrame>
+        <p:nvGraphicFramePr>
+          <p:cNvPr id="19" name="Chart 2" descr=""/>
+          <p:cNvGraphicFramePr/>
+          <p:nvPr/>
+        </p:nvGraphicFramePr>
+        <p:xfrm>
+          <a:off x="621792" y="3218688"/>
+          <a:ext cx="10945368" cy="2679192"/>
+        </p:xfrm>
+        <a:graphic xmlns:a="http://schemas.openxmlformats.org/drawingml/2006/main">
+          <a:graphicData uri="http://schemas.openxmlformats.org/drawingml/2006/chart">
+            <c:chart xmlns:c="http://schemas.openxmlformats.org/drawingml/2006/chart" r:id="rId3"/>
+          </a:graphicData>
+        </a:graphic>
+      </p:graphicFrame>
+      <p:graphicFrame>
+        <p:nvGraphicFramePr>
+          <p:cNvPr id="20" name="Chart 3" descr=""/>
+          <p:cNvGraphicFramePr/>
+          <p:nvPr/>
+        </p:nvGraphicFramePr>
+        <p:xfrm>
+          <a:off x="621792" y="3218688"/>
+          <a:ext cx="10945368" cy="2679192"/>
+        </p:xfrm>
+        <a:graphic xmlns:a="http://schemas.openxmlformats.org/drawingml/2006/main">
+          <a:graphicData uri="http://schemas.openxmlformats.org/drawingml/2006/chart">
+            <c:chart xmlns:c="http://schemas.openxmlformats.org/drawingml/2006/chart" r:id="rId4"/>
+          </a:graphicData>
+        </a:graphic>
+      </p:graphicFrame>
+      <p:sp>
+        <p:nvSpPr>
+          <p:cNvPr id="21" name="Shape 15"/>
           <p:cNvSpPr/>
           <p:nvPr/>
         </p:nvSpPr>
         <p:spPr>
           <a:xfrm>
-            <a:off x="8229600" y="1207008"/>
-            <a:ext cx="3502152" cy="4782312"/>
+            <a:off x="4951476" y="3049524"/>
+            <a:ext cx="310896" cy="45720"/>
           </a:xfrm>
           <a:prstGeom prst="rect">
             <a:avLst/>
           </a:prstGeom>
           <a:solidFill>
-            <a:srgbClr val="FFFFFF"/>
+            <a:srgbClr val="9AA3AD"/>
           </a:solidFill>
           <a:ln/>
         </p:spPr>
       </p:sp>
       <p:sp>
         <p:nvSpPr>
-          <p:cNvPr id="10" name="Text 7"/>
-          <p:cNvSpPr txBox="1"/>
-          <p:nvPr/>
-        </p:nvSpPr>
-        <p:spPr>
-          <a:xfrm>
-            <a:off x="8458200" y="1344168"/>
-            <a:ext cx="3044952" cy="292608"/>
+          <p:cNvPr id="22" name="Shape 16"/>
+          <p:cNvSpPr/>
+          <p:nvPr/>
+        </p:nvSpPr>
+        <p:spPr>
+          <a:xfrm>
+            <a:off x="5052060" y="3017520"/>
+            <a:ext cx="109728" cy="109728"/>
+          </a:xfrm>
+          <a:prstGeom prst="ellipse">
+            <a:avLst/>
+          </a:prstGeom>
+          <a:solidFill>
+            <a:srgbClr val="9AA3AD"/>
+          </a:solidFill>
+          <a:ln/>
+        </p:spPr>
+      </p:sp>
+      <p:sp>
+        <p:nvSpPr>
+          <p:cNvPr id="23" name="Text 17"/>
+          <p:cNvSpPr txBox="1"/>
+          <p:nvPr/>
+        </p:nvSpPr>
+        <p:spPr>
+          <a:xfrm>
+            <a:off x="5335524" y="2926080"/>
+            <a:ext cx="777240" cy="292608"/>
           </a:xfrm>
           <a:prstGeom prst="rect">
             <a:avLst/>
@@ -26238,7 +27568,7 @@
               <a:buNone/>
             </a:pPr>
             <a:r>
-              <a:rPr lang="en-US" sz="1500" dirty="0">
+              <a:rPr lang="en-US" sz="1400" dirty="0">
                 <a:solidFill>
                   <a:srgbClr val="1A1A1A"/>
                 </a:solidFill>
@@ -26246,44 +27576,24 @@
                 <a:ea typeface="Inter" pitchFamily="34" charset="-122"/>
                 <a:cs typeface="Inter" pitchFamily="34" charset="-120"/>
               </a:rPr>
-              <a:t>What it says</a:t>
-            </a:r>
-            <a:endParaRPr lang="en-US" sz="1500" dirty="0"/>
-          </a:p>
-        </p:txBody>
-      </p:sp>
-      <p:sp>
-        <p:nvSpPr>
-          <p:cNvPr id="11" name="Shape 8"/>
+              <a:t>2025</a:t>
+            </a:r>
+            <a:endParaRPr lang="en-US" sz="1400" dirty="0"/>
+          </a:p>
+        </p:txBody>
+      </p:sp>
+      <p:sp>
+        <p:nvSpPr>
+          <p:cNvPr id="24" name="Shape 18"/>
           <p:cNvSpPr/>
           <p:nvPr/>
         </p:nvSpPr>
         <p:spPr>
           <a:xfrm>
-            <a:off x="8458200" y="1691640"/>
-            <a:ext cx="3044952" cy="10973"/>
-          </a:xfrm>
-          <a:prstGeom prst="rect">
-            <a:avLst/>
-          </a:prstGeom>
-          <a:solidFill>
-            <a:srgbClr val="1A1A1A"/>
-          </a:solidFill>
-          <a:ln/>
-        </p:spPr>
-      </p:sp>
-      <p:sp>
-        <p:nvSpPr>
-          <p:cNvPr id="12" name="Shape 9"/>
-          <p:cNvSpPr/>
-          <p:nvPr/>
-        </p:nvSpPr>
-        <p:spPr>
-          <a:xfrm>
-            <a:off x="8458200" y="1938528"/>
-            <a:ext cx="100584" cy="100584"/>
-          </a:xfrm>
-          <a:prstGeom prst="ellipse">
+            <a:off x="6185916" y="3049524"/>
+            <a:ext cx="310896" cy="45720"/>
+          </a:xfrm>
+          <a:prstGeom prst="rect">
             <a:avLst/>
           </a:prstGeom>
           <a:solidFill>
@@ -26294,89 +27604,50 @@
       </p:sp>
       <p:sp>
         <p:nvSpPr>
-          <p:cNvPr id="13" name="Text 10"/>
-          <p:cNvSpPr txBox="1"/>
-          <p:nvPr/>
-        </p:nvSpPr>
-        <p:spPr>
-          <a:xfrm>
-            <a:off x="8705088" y="1810512"/>
-            <a:ext cx="2834640" cy="1051560"/>
-          </a:xfrm>
-          <a:prstGeom prst="rect">
-            <a:avLst/>
-          </a:prstGeom>
-          <a:noFill/>
-          <a:ln/>
-        </p:spPr>
-        <p:txBody>
-          <a:bodyPr wrap="square" lIns="0" tIns="0" rIns="0" bIns="0" rtlCol="0" anchor="t"/>
+          <p:cNvPr id="25" name="Shape 19"/>
+          <p:cNvSpPr/>
+          <p:nvPr/>
+        </p:nvSpPr>
+        <p:spPr>
+          <a:xfrm>
+            <a:off x="6286500" y="3017520"/>
+            <a:ext cx="109728" cy="109728"/>
+          </a:xfrm>
+          <a:prstGeom prst="ellipse">
+            <a:avLst/>
+          </a:prstGeom>
+          <a:solidFill>
+            <a:srgbClr val="2587C5"/>
+          </a:solidFill>
+          <a:ln/>
+        </p:spPr>
+      </p:sp>
+      <p:sp>
+        <p:nvSpPr>
+          <p:cNvPr id="26" name="Text 20"/>
+          <p:cNvSpPr txBox="1"/>
+          <p:nvPr/>
+        </p:nvSpPr>
+        <p:spPr>
+          <a:xfrm>
+            <a:off x="6569964" y="2926080"/>
+            <a:ext cx="777240" cy="292608"/>
+          </a:xfrm>
+          <a:prstGeom prst="rect">
+            <a:avLst/>
+          </a:prstGeom>
+          <a:noFill/>
+          <a:ln/>
+        </p:spPr>
+        <p:txBody>
+          <a:bodyPr wrap="square" lIns="0" tIns="0" rIns="0" bIns="0" rtlCol="0" anchor="ctr"/>
           <a:lstStyle/>
           <a:p>
             <a:pPr indent="0" marL="0">
               <a:buNone/>
             </a:pPr>
             <a:r>
-              <a:rPr lang="en-US" sz="1500" b="1" dirty="0">
-                <a:solidFill>
-                  <a:srgbClr val="2587C5"/>
-                </a:solidFill>
-                <a:latin typeface="Inter" pitchFamily="34" charset="0"/>
-                <a:ea typeface="Inter" pitchFamily="34" charset="-122"/>
-                <a:cs typeface="Inter" pitchFamily="34" charset="-120"/>
-              </a:rPr>
-              <a:t>−76 fixed staff, Sep to Sep, to 1,540.</a:t>
-            </a:r>
-            <a:endParaRPr lang="en-US" sz="1500" dirty="0"/>
-          </a:p>
-        </p:txBody>
-      </p:sp>
-      <p:sp>
-        <p:nvSpPr>
-          <p:cNvPr id="14" name="Shape 11"/>
-          <p:cNvSpPr/>
-          <p:nvPr/>
-        </p:nvSpPr>
-        <p:spPr>
-          <a:xfrm>
-            <a:off x="8458200" y="3072384"/>
-            <a:ext cx="100584" cy="100584"/>
-          </a:xfrm>
-          <a:prstGeom prst="ellipse">
-            <a:avLst/>
-          </a:prstGeom>
-          <a:solidFill>
-            <a:srgbClr val="1A1A1A"/>
-          </a:solidFill>
-          <a:ln/>
-        </p:spPr>
-      </p:sp>
-      <p:sp>
-        <p:nvSpPr>
-          <p:cNvPr id="15" name="Text 12"/>
-          <p:cNvSpPr txBox="1"/>
-          <p:nvPr/>
-        </p:nvSpPr>
-        <p:spPr>
-          <a:xfrm>
-            <a:off x="8705088" y="2944368"/>
-            <a:ext cx="2834640" cy="1051560"/>
-          </a:xfrm>
-          <a:prstGeom prst="rect">
-            <a:avLst/>
-          </a:prstGeom>
-          <a:noFill/>
-          <a:ln/>
-        </p:spPr>
-        <p:txBody>
-          <a:bodyPr wrap="square" lIns="0" tIns="0" rIns="0" bIns="0" rtlCol="0" anchor="t"/>
-          <a:lstStyle/>
-          <a:p>
-            <a:pPr indent="0" marL="0">
-              <a:buNone/>
-            </a:pPr>
-            <a:r>
-              <a:rPr lang="en-US" sz="1500" dirty="0">
+              <a:rPr lang="en-US" sz="1400" dirty="0">
                 <a:solidFill>
                   <a:srgbClr val="1A1A1A"/>
                 </a:solidFill>
@@ -26384,74 +27655,15 @@
                 <a:ea typeface="Inter" pitchFamily="34" charset="-122"/>
                 <a:cs typeface="Inter" pitchFamily="34" charset="-120"/>
               </a:rPr>
-              <a:t>Technicians −17, advisors −7, managers −3.</a:t>
-            </a:r>
-            <a:endParaRPr lang="en-US" sz="1500" dirty="0"/>
-          </a:p>
-        </p:txBody>
-      </p:sp>
-      <p:sp>
-        <p:nvSpPr>
-          <p:cNvPr id="16" name="Shape 13"/>
-          <p:cNvSpPr/>
-          <p:nvPr/>
-        </p:nvSpPr>
-        <p:spPr>
-          <a:xfrm>
-            <a:off x="8458200" y="4206240"/>
-            <a:ext cx="100584" cy="100584"/>
-          </a:xfrm>
-          <a:prstGeom prst="ellipse">
-            <a:avLst/>
-          </a:prstGeom>
-          <a:solidFill>
-            <a:srgbClr val="1A1A1A"/>
-          </a:solidFill>
-          <a:ln/>
-        </p:spPr>
-      </p:sp>
-      <p:sp>
-        <p:nvSpPr>
-          <p:cNvPr id="17" name="Text 14"/>
-          <p:cNvSpPr txBox="1"/>
-          <p:nvPr/>
-        </p:nvSpPr>
-        <p:spPr>
-          <a:xfrm>
-            <a:off x="8705088" y="4078224"/>
-            <a:ext cx="2834640" cy="1051560"/>
-          </a:xfrm>
-          <a:prstGeom prst="rect">
-            <a:avLst/>
-          </a:prstGeom>
-          <a:noFill/>
-          <a:ln/>
-        </p:spPr>
-        <p:txBody>
-          <a:bodyPr wrap="square" lIns="0" tIns="0" rIns="0" bIns="0" rtlCol="0" anchor="t"/>
-          <a:lstStyle/>
-          <a:p>
-            <a:pPr indent="0" marL="0">
-              <a:buNone/>
-            </a:pPr>
-            <a:r>
-              <a:rPr lang="en-US" sz="1500" dirty="0">
-                <a:solidFill>
-                  <a:srgbClr val="1A1A1A"/>
-                </a:solidFill>
-                <a:latin typeface="Inter" pitchFamily="34" charset="0"/>
-                <a:ea typeface="Inter" pitchFamily="34" charset="-122"/>
-                <a:cs typeface="Inter" pitchFamily="34" charset="-120"/>
-              </a:rPr>
-              <a:t>Low of 1,530 in Jan 26; up 10 since.</a:t>
-            </a:r>
-            <a:endParaRPr lang="en-US" sz="1500" dirty="0"/>
-          </a:p>
-        </p:txBody>
-      </p:sp>
-      <p:sp>
-        <p:nvSpPr>
-          <p:cNvPr id="18" name="Shape 15"/>
+              <a:t>2026</a:t>
+            </a:r>
+            <a:endParaRPr lang="en-US" sz="1400" dirty="0"/>
+          </a:p>
+        </p:txBody>
+      </p:sp>
+      <p:sp>
+        <p:nvSpPr>
+          <p:cNvPr id="27" name="Shape 21"/>
           <p:cNvSpPr/>
           <p:nvPr/>
         </p:nvSpPr>
@@ -26471,7 +27683,7 @@
       </p:sp>
       <p:sp>
         <p:nvSpPr>
-          <p:cNvPr id="19" name="Text 16"/>
+          <p:cNvPr id="28" name="Text 22"/>
           <p:cNvSpPr txBox="1"/>
           <p:nvPr/>
         </p:nvSpPr>
